--- a/PNEC_QuadChart_FY27.pptx
+++ b/PNEC_QuadChart_FY27.pptx
@@ -1215,7 +1215,7 @@
         <p:spPr>
           <a:xfrm>
             <a:off x="457200" y="1353312"/>
-            <a:ext cx="5532120" cy="640080"/>
+            <a:ext cx="5532120" cy="868680"/>
           </a:xfrm>
           <a:prstGeom prst="rect">
             <a:avLst/>
@@ -1231,6 +1231,207 @@
               <a:buNone/>
             </a:pPr>
             <a:r>
+              <a:rPr lang="en-US" sz="1000" dirty="0">
+                <a:solidFill>
+                  <a:srgbClr val="303030"/>
+                </a:solidFill>
+                <a:latin typeface="Calibri" pitchFamily="34" charset="0"/>
+                <a:ea typeface="Calibri" pitchFamily="34" charset="-122"/>
+                <a:cs typeface="Calibri" pitchFamily="34" charset="-120"/>
+              </a:rPr>
+              <a:t>PINN gives us a </a:t>
+            </a:r>
+            <a:pPr indent="0" marL="0">
+              <a:buNone/>
+            </a:pPr>
+            <a:r>
+              <a:rPr lang="en-US" sz="1000" b="1" dirty="0">
+                <a:solidFill>
+                  <a:srgbClr val="1F3A5F"/>
+                </a:solidFill>
+                <a:latin typeface="Calibri" pitchFamily="34" charset="0"/>
+                <a:ea typeface="Calibri" pitchFamily="34" charset="-122"/>
+                <a:cs typeface="Calibri" pitchFamily="34" charset="-120"/>
+              </a:rPr>
+              <a:t>measuring stick</a:t>
+            </a:r>
+            <a:pPr indent="0" marL="0">
+              <a:buNone/>
+            </a:pPr>
+            <a:r>
+              <a:rPr lang="en-US" sz="1000" dirty="0">
+                <a:solidFill>
+                  <a:srgbClr val="303030"/>
+                </a:solidFill>
+                <a:latin typeface="Calibri" pitchFamily="34" charset="0"/>
+                <a:ea typeface="Calibri" pitchFamily="34" charset="-122"/>
+                <a:cs typeface="Calibri" pitchFamily="34" charset="-120"/>
+              </a:rPr>
+              <a:t> from real diffusion data. LLM agents are a </a:t>
+            </a:r>
+            <a:pPr indent="0" marL="0">
+              <a:buNone/>
+            </a:pPr>
+            <a:r>
+              <a:rPr lang="en-US" sz="1000" b="1" dirty="0">
+                <a:solidFill>
+                  <a:srgbClr val="1F3A5F"/>
+                </a:solidFill>
+                <a:latin typeface="Calibri" pitchFamily="34" charset="0"/>
+                <a:ea typeface="Calibri" pitchFamily="34" charset="-122"/>
+                <a:cs typeface="Calibri" pitchFamily="34" charset="-120"/>
+              </a:rPr>
+              <a:t>scale model</a:t>
+            </a:r>
+            <a:pPr indent="0" marL="0">
+              <a:buNone/>
+            </a:pPr>
+            <a:r>
+              <a:rPr lang="en-US" sz="1000" dirty="0">
+                <a:solidFill>
+                  <a:srgbClr val="303030"/>
+                </a:solidFill>
+                <a:latin typeface="Calibri" pitchFamily="34" charset="0"/>
+                <a:ea typeface="Calibri" pitchFamily="34" charset="-122"/>
+                <a:cs typeface="Calibri" pitchFamily="34" charset="-120"/>
+              </a:rPr>
+              <a:t>. The </a:t>
+            </a:r>
+            <a:pPr indent="0" marL="0">
+              <a:buNone/>
+            </a:pPr>
+            <a:r>
+              <a:rPr lang="en-US" sz="1000" b="1" dirty="0">
+                <a:solidFill>
+                  <a:srgbClr val="1A1A1A"/>
+                </a:solidFill>
+                <a:latin typeface="Calibri" pitchFamily="34" charset="0"/>
+                <a:ea typeface="Calibri" pitchFamily="34" charset="-122"/>
+                <a:cs typeface="Calibri" pitchFamily="34" charset="-120"/>
+              </a:rPr>
+              <a:t>same coefficients</a:t>
+            </a:r>
+            <a:pPr indent="0" marL="0">
+              <a:buNone/>
+            </a:pPr>
+            <a:r>
+              <a:rPr lang="en-US" sz="1000" dirty="0">
+                <a:solidFill>
+                  <a:srgbClr val="303030"/>
+                </a:solidFill>
+                <a:latin typeface="Calibri" pitchFamily="34" charset="0"/>
+                <a:ea typeface="Calibri" pitchFamily="34" charset="-122"/>
+                <a:cs typeface="Calibri" pitchFamily="34" charset="-120"/>
+              </a:rPr>
+              <a:t> fit real data and audit the agent sim — fills the population-level validation gap (Volkova 2026); networked replication of Hackenburg et al. (Science 2025) beyond dyadic measurement.</a:t>
+            </a:r>
+            <a:endParaRPr lang="en-US" sz="1000" dirty="0"/>
+          </a:p>
+        </p:txBody>
+      </p:sp>
+      <p:sp>
+        <p:nvSpPr>
+          <p:cNvPr id="13" name="Text 11"/>
+          <p:cNvSpPr/>
+          <p:nvPr/>
+        </p:nvSpPr>
+        <p:spPr>
+          <a:xfrm>
+            <a:off x="457200" y="2267712"/>
+            <a:ext cx="5532120" cy="201168"/>
+          </a:xfrm>
+          <a:prstGeom prst="rect">
+            <a:avLst/>
+          </a:prstGeom>
+          <a:noFill/>
+          <a:ln/>
+        </p:spPr>
+        <p:txBody>
+          <a:bodyPr wrap="square" lIns="0" tIns="0" rIns="0" bIns="0" rtlCol="0" anchor="ctr"/>
+          <a:lstStyle/>
+          <a:p>
+            <a:pPr indent="0" marL="0">
+              <a:buNone/>
+            </a:pPr>
+            <a:r>
+              <a:rPr lang="en-US" sz="1050" b="1" i="1" dirty="0">
+                <a:solidFill>
+                  <a:srgbClr val="1F3A5F"/>
+                </a:solidFill>
+                <a:latin typeface="Calibri" pitchFamily="34" charset="0"/>
+                <a:ea typeface="Calibri" pitchFamily="34" charset="-122"/>
+                <a:cs typeface="Calibri" pitchFamily="34" charset="-120"/>
+              </a:rPr>
+              <a:t>The fingerprint — 6 coefficients fit per community</a:t>
+            </a:r>
+            <a:endParaRPr lang="en-US" sz="1050" dirty="0"/>
+          </a:p>
+        </p:txBody>
+      </p:sp>
+      <p:sp>
+        <p:nvSpPr>
+          <p:cNvPr id="14" name="Text 12"/>
+          <p:cNvSpPr/>
+          <p:nvPr/>
+        </p:nvSpPr>
+        <p:spPr>
+          <a:xfrm>
+            <a:off x="457200" y="2450592"/>
+            <a:ext cx="960120" cy="182880"/>
+          </a:xfrm>
+          <a:prstGeom prst="rect">
+            <a:avLst/>
+          </a:prstGeom>
+          <a:noFill/>
+          <a:ln/>
+        </p:spPr>
+        <p:txBody>
+          <a:bodyPr wrap="square" lIns="0" tIns="0" rIns="0" bIns="0" rtlCol="0" anchor="ctr"/>
+          <a:lstStyle/>
+          <a:p>
+            <a:pPr algn="l" indent="0" marL="0">
+              <a:buNone/>
+            </a:pPr>
+            <a:r>
+              <a:rPr lang="en-US" sz="1000" b="1" dirty="0">
+                <a:solidFill>
+                  <a:srgbClr val="B85D2E"/>
+                </a:solidFill>
+                <a:latin typeface="Calibri" pitchFamily="34" charset="0"/>
+                <a:ea typeface="Calibri" pitchFamily="34" charset="-122"/>
+                <a:cs typeface="Calibri" pitchFamily="34" charset="-120"/>
+              </a:rPr>
+              <a:t>⟨α⟩</a:t>
+            </a:r>
+            <a:endParaRPr lang="en-US" sz="1000" dirty="0"/>
+          </a:p>
+        </p:txBody>
+      </p:sp>
+      <p:sp>
+        <p:nvSpPr>
+          <p:cNvPr id="15" name="Text 13"/>
+          <p:cNvSpPr/>
+          <p:nvPr/>
+        </p:nvSpPr>
+        <p:spPr>
+          <a:xfrm>
+            <a:off x="1417320" y="2450592"/>
+            <a:ext cx="4480560" cy="182880"/>
+          </a:xfrm>
+          <a:prstGeom prst="rect">
+            <a:avLst/>
+          </a:prstGeom>
+          <a:noFill/>
+          <a:ln/>
+        </p:spPr>
+        <p:txBody>
+          <a:bodyPr wrap="square" lIns="0" tIns="0" rIns="0" bIns="0" rtlCol="0" anchor="ctr"/>
+          <a:lstStyle/>
+          <a:p>
+            <a:pPr algn="l" indent="0" marL="0">
+              <a:buNone/>
+            </a:pPr>
+            <a:r>
               <a:rPr lang="en-US" sz="950" dirty="0">
                 <a:solidFill>
                   <a:srgbClr val="303030"/>
@@ -1239,23 +1440,73 @@
                 <a:ea typeface="Calibri" pitchFamily="34" charset="-122"/>
                 <a:cs typeface="Calibri" pitchFamily="34" charset="-120"/>
               </a:rPr>
-              <a:t>Cognitive-warfare analysts need a </a:t>
-            </a:r>
-            <a:pPr indent="0" marL="0">
-              <a:buNone/>
-            </a:pPr>
-            <a:r>
-              <a:rPr lang="en-US" sz="950" b="1" dirty="0">
-                <a:solidFill>
-                  <a:srgbClr val="1A1A1A"/>
-                </a:solidFill>
-                <a:latin typeface="Calibri" pitchFamily="34" charset="0"/>
-                <a:ea typeface="Calibri" pitchFamily="34" charset="-122"/>
-                <a:cs typeface="Calibri" pitchFamily="34" charset="-120"/>
-              </a:rPr>
-              <a:t>controlled environment</a:t>
-            </a:r>
-            <a:pPr indent="0" marL="0">
+              <a:t>stubbornness — pull to baseline (FJ)</a:t>
+            </a:r>
+            <a:endParaRPr lang="en-US" sz="950" dirty="0"/>
+          </a:p>
+        </p:txBody>
+      </p:sp>
+      <p:sp>
+        <p:nvSpPr>
+          <p:cNvPr id="16" name="Text 14"/>
+          <p:cNvSpPr/>
+          <p:nvPr/>
+        </p:nvSpPr>
+        <p:spPr>
+          <a:xfrm>
+            <a:off x="457200" y="2633472"/>
+            <a:ext cx="960120" cy="182880"/>
+          </a:xfrm>
+          <a:prstGeom prst="rect">
+            <a:avLst/>
+          </a:prstGeom>
+          <a:noFill/>
+          <a:ln/>
+        </p:spPr>
+        <p:txBody>
+          <a:bodyPr wrap="square" lIns="0" tIns="0" rIns="0" bIns="0" rtlCol="0" anchor="ctr"/>
+          <a:lstStyle/>
+          <a:p>
+            <a:pPr algn="l" indent="0" marL="0">
+              <a:buNone/>
+            </a:pPr>
+            <a:r>
+              <a:rPr lang="en-US" sz="1000" b="1" dirty="0">
+                <a:solidFill>
+                  <a:srgbClr val="B85D2E"/>
+                </a:solidFill>
+                <a:latin typeface="Calibri" pitchFamily="34" charset="0"/>
+                <a:ea typeface="Calibri" pitchFamily="34" charset="-122"/>
+                <a:cs typeface="Calibri" pitchFamily="34" charset="-120"/>
+              </a:rPr>
+              <a:t>⟨ε⟩</a:t>
+            </a:r>
+            <a:endParaRPr lang="en-US" sz="1000" dirty="0"/>
+          </a:p>
+        </p:txBody>
+      </p:sp>
+      <p:sp>
+        <p:nvSpPr>
+          <p:cNvPr id="17" name="Text 15"/>
+          <p:cNvSpPr/>
+          <p:nvPr/>
+        </p:nvSpPr>
+        <p:spPr>
+          <a:xfrm>
+            <a:off x="1417320" y="2633472"/>
+            <a:ext cx="4480560" cy="182880"/>
+          </a:xfrm>
+          <a:prstGeom prst="rect">
+            <a:avLst/>
+          </a:prstGeom>
+          <a:noFill/>
+          <a:ln/>
+        </p:spPr>
+        <p:txBody>
+          <a:bodyPr wrap="square" lIns="0" tIns="0" rIns="0" bIns="0" rtlCol="0" anchor="ctr"/>
+          <a:lstStyle/>
+          <a:p>
+            <a:pPr algn="l" indent="0" marL="0">
               <a:buNone/>
             </a:pPr>
             <a:r>
@@ -1267,23 +1518,73 @@
                 <a:ea typeface="Calibri" pitchFamily="34" charset="-122"/>
                 <a:cs typeface="Calibri" pitchFamily="34" charset="-120"/>
               </a:rPr>
-              <a:t> to study how persuasion moves through online echo chambers and to test mitigations before deployment. We build a </a:t>
-            </a:r>
-            <a:pPr indent="0" marL="0">
-              <a:buNone/>
-            </a:pPr>
-            <a:r>
-              <a:rPr lang="en-US" sz="950" b="1" dirty="0">
-                <a:solidFill>
-                  <a:srgbClr val="1F3A5F"/>
-                </a:solidFill>
-                <a:latin typeface="Calibri" pitchFamily="34" charset="0"/>
-                <a:ea typeface="Calibri" pitchFamily="34" charset="-122"/>
-                <a:cs typeface="Calibri" pitchFamily="34" charset="-120"/>
-              </a:rPr>
-              <a:t>validated synthetic test environment</a:t>
-            </a:r>
-            <a:pPr indent="0" marL="0">
+              <a:t>confidence radius — chamber tightness (HK)</a:t>
+            </a:r>
+            <a:endParaRPr lang="en-US" sz="950" dirty="0"/>
+          </a:p>
+        </p:txBody>
+      </p:sp>
+      <p:sp>
+        <p:nvSpPr>
+          <p:cNvPr id="18" name="Text 16"/>
+          <p:cNvSpPr/>
+          <p:nvPr/>
+        </p:nvSpPr>
+        <p:spPr>
+          <a:xfrm>
+            <a:off x="457200" y="2816352"/>
+            <a:ext cx="960120" cy="182880"/>
+          </a:xfrm>
+          <a:prstGeom prst="rect">
+            <a:avLst/>
+          </a:prstGeom>
+          <a:noFill/>
+          <a:ln/>
+        </p:spPr>
+        <p:txBody>
+          <a:bodyPr wrap="square" lIns="0" tIns="0" rIns="0" bIns="0" rtlCol="0" anchor="ctr"/>
+          <a:lstStyle/>
+          <a:p>
+            <a:pPr algn="l" indent="0" marL="0">
+              <a:buNone/>
+            </a:pPr>
+            <a:r>
+              <a:rPr lang="en-US" sz="1000" b="1" dirty="0">
+                <a:solidFill>
+                  <a:srgbClr val="B85D2E"/>
+                </a:solidFill>
+                <a:latin typeface="Calibri" pitchFamily="34" charset="0"/>
+                <a:ea typeface="Calibri" pitchFamily="34" charset="-122"/>
+                <a:cs typeface="Calibri" pitchFamily="34" charset="-120"/>
+              </a:rPr>
+              <a:t>⟨w_in/out⟩</a:t>
+            </a:r>
+            <a:endParaRPr lang="en-US" sz="1000" dirty="0"/>
+          </a:p>
+        </p:txBody>
+      </p:sp>
+      <p:sp>
+        <p:nvSpPr>
+          <p:cNvPr id="19" name="Text 17"/>
+          <p:cNvSpPr/>
+          <p:nvPr/>
+        </p:nvSpPr>
+        <p:spPr>
+          <a:xfrm>
+            <a:off x="1417320" y="2816352"/>
+            <a:ext cx="4480560" cy="182880"/>
+          </a:xfrm>
+          <a:prstGeom prst="rect">
+            <a:avLst/>
+          </a:prstGeom>
+          <a:noFill/>
+          <a:ln/>
+        </p:spPr>
+        <p:txBody>
+          <a:bodyPr wrap="square" lIns="0" tIns="0" rIns="0" bIns="0" rtlCol="0" anchor="ctr"/>
+          <a:lstStyle/>
+          <a:p>
+            <a:pPr algn="l" indent="0" marL="0">
               <a:buNone/>
             </a:pPr>
             <a:r>
@@ -1295,7 +1596,7 @@
                 <a:ea typeface="Calibri" pitchFamily="34" charset="-122"/>
                 <a:cs typeface="Calibri" pitchFamily="34" charset="-120"/>
               </a:rPr>
-              <a:t>: physics-informed coefficients fit to real diffusion data calibrate an LLM-driven agent population.</a:t>
+              <a:t>in-group vs out-group influence ratio (FJ)</a:t>
             </a:r>
             <a:endParaRPr lang="en-US" sz="950" dirty="0"/>
           </a:p>
@@ -1303,90 +1604,69 @@
       </p:sp>
       <p:sp>
         <p:nvSpPr>
-          <p:cNvPr id="13" name="Text 11"/>
-          <p:cNvSpPr/>
-          <p:nvPr/>
-        </p:nvSpPr>
-        <p:spPr>
-          <a:xfrm>
-            <a:off x="457200" y="2039112"/>
-            <a:ext cx="5532120" cy="201168"/>
-          </a:xfrm>
-          <a:prstGeom prst="rect">
-            <a:avLst/>
-          </a:prstGeom>
-          <a:noFill/>
-          <a:ln/>
-        </p:spPr>
-        <p:txBody>
-          <a:bodyPr wrap="square" lIns="0" tIns="0" rIns="0" bIns="0" rtlCol="0" anchor="ctr"/>
-          <a:lstStyle/>
-          <a:p>
-            <a:pPr indent="0" marL="0">
-              <a:buNone/>
-            </a:pPr>
-            <a:r>
-              <a:rPr lang="en-US" sz="1050" b="1" i="1" dirty="0">
-                <a:solidFill>
-                  <a:srgbClr val="1F3A5F"/>
-                </a:solidFill>
-                <a:latin typeface="Calibri" pitchFamily="34" charset="0"/>
-                <a:ea typeface="Calibri" pitchFamily="34" charset="-122"/>
-                <a:cs typeface="Calibri" pitchFamily="34" charset="-120"/>
-              </a:rPr>
-              <a:t>Novelty</a:t>
-            </a:r>
-            <a:endParaRPr lang="en-US" sz="1050" dirty="0"/>
-          </a:p>
-        </p:txBody>
-      </p:sp>
-      <p:sp>
-        <p:nvSpPr>
-          <p:cNvPr id="14" name="Text 12"/>
-          <p:cNvSpPr/>
-          <p:nvPr/>
-        </p:nvSpPr>
-        <p:spPr>
-          <a:xfrm>
-            <a:off x="457200" y="2240280"/>
-            <a:ext cx="5532120" cy="365760"/>
-          </a:xfrm>
-          <a:prstGeom prst="rect">
-            <a:avLst/>
-          </a:prstGeom>
-          <a:noFill/>
-          <a:ln/>
-        </p:spPr>
-        <p:txBody>
-          <a:bodyPr wrap="square" lIns="0" tIns="0" rIns="0" bIns="0" rtlCol="0" anchor="t"/>
-          <a:lstStyle/>
-          <a:p>
-            <a:pPr marL="342900" indent="-342900">
-              <a:spcAft>
-                <a:spcPts val="100"/>
-              </a:spcAft>
-              <a:buSzPct val="100000"/>
-              <a:buChar char="•"/>
-            </a:pPr>
-            <a:r>
-              <a:rPr lang="en-US" sz="900" b="1" dirty="0">
-                <a:solidFill>
-                  <a:srgbClr val="1A1A1A"/>
-                </a:solidFill>
-                <a:latin typeface="Calibri" pitchFamily="34" charset="0"/>
-                <a:ea typeface="Calibri" pitchFamily="34" charset="-122"/>
-                <a:cs typeface="Calibri" pitchFamily="34" charset="-120"/>
-              </a:rPr>
-              <a:t>PINN coefficients </a:t>
-            </a:r>
-            <a:pPr indent="0" marL="0">
-              <a:spcAft>
-                <a:spcPts val="100"/>
-              </a:spcAft>
-              <a:buNone/>
-            </a:pPr>
-            <a:r>
-              <a:rPr lang="en-US" sz="900" dirty="0">
+          <p:cNvPr id="20" name="Text 18"/>
+          <p:cNvSpPr/>
+          <p:nvPr/>
+        </p:nvSpPr>
+        <p:spPr>
+          <a:xfrm>
+            <a:off x="457200" y="2999232"/>
+            <a:ext cx="960120" cy="182880"/>
+          </a:xfrm>
+          <a:prstGeom prst="rect">
+            <a:avLst/>
+          </a:prstGeom>
+          <a:noFill/>
+          <a:ln/>
+        </p:spPr>
+        <p:txBody>
+          <a:bodyPr wrap="square" lIns="0" tIns="0" rIns="0" bIns="0" rtlCol="0" anchor="ctr"/>
+          <a:lstStyle/>
+          <a:p>
+            <a:pPr algn="l" indent="0" marL="0">
+              <a:buNone/>
+            </a:pPr>
+            <a:r>
+              <a:rPr lang="en-US" sz="1000" b="1" dirty="0">
+                <a:solidFill>
+                  <a:srgbClr val="B85D2E"/>
+                </a:solidFill>
+                <a:latin typeface="Calibri" pitchFamily="34" charset="0"/>
+                <a:ea typeface="Calibri" pitchFamily="34" charset="-122"/>
+                <a:cs typeface="Calibri" pitchFamily="34" charset="-120"/>
+              </a:rPr>
+              <a:t>D</a:t>
+            </a:r>
+            <a:endParaRPr lang="en-US" sz="1000" dirty="0"/>
+          </a:p>
+        </p:txBody>
+      </p:sp>
+      <p:sp>
+        <p:nvSpPr>
+          <p:cNvPr id="21" name="Text 19"/>
+          <p:cNvSpPr/>
+          <p:nvPr/>
+        </p:nvSpPr>
+        <p:spPr>
+          <a:xfrm>
+            <a:off x="1417320" y="2999232"/>
+            <a:ext cx="4480560" cy="182880"/>
+          </a:xfrm>
+          <a:prstGeom prst="rect">
+            <a:avLst/>
+          </a:prstGeom>
+          <a:noFill/>
+          <a:ln/>
+        </p:spPr>
+        <p:txBody>
+          <a:bodyPr wrap="square" lIns="0" tIns="0" rIns="0" bIns="0" rtlCol="0" anchor="ctr"/>
+          <a:lstStyle/>
+          <a:p>
+            <a:pPr algn="l" indent="0" marL="0">
+              <a:buNone/>
+            </a:pPr>
+            <a:r>
+              <a:rPr lang="en-US" sz="950" dirty="0">
                 <a:solidFill>
                   <a:srgbClr val="303030"/>
                 </a:solidFill>
@@ -1394,59 +1674,77 @@
                 <a:ea typeface="Calibri" pitchFamily="34" charset="-122"/>
                 <a:cs typeface="Calibri" pitchFamily="34" charset="-120"/>
               </a:rPr>
-              <a:t>as the calibration &amp; audit fingerprint for agentic populations — fills a population-level validation gap (Volkova, 2026)</a:t>
-            </a:r>
-            <a:endParaRPr lang="en-US" sz="900" dirty="0"/>
-          </a:p>
-        </p:txBody>
-      </p:sp>
-      <p:sp>
-        <p:nvSpPr>
-          <p:cNvPr id="15" name="Text 13"/>
-          <p:cNvSpPr/>
-          <p:nvPr/>
-        </p:nvSpPr>
-        <p:spPr>
-          <a:xfrm>
-            <a:off x="457200" y="2606040"/>
-            <a:ext cx="5532120" cy="365760"/>
-          </a:xfrm>
-          <a:prstGeom prst="rect">
-            <a:avLst/>
-          </a:prstGeom>
-          <a:noFill/>
-          <a:ln/>
-        </p:spPr>
-        <p:txBody>
-          <a:bodyPr wrap="square" lIns="0" tIns="0" rIns="0" bIns="0" rtlCol="0" anchor="t"/>
-          <a:lstStyle/>
-          <a:p>
-            <a:pPr marL="342900" indent="-342900">
-              <a:spcAft>
-                <a:spcPts val="100"/>
-              </a:spcAft>
-              <a:buSzPct val="100000"/>
-              <a:buChar char="•"/>
-            </a:pPr>
-            <a:r>
-              <a:rPr lang="en-US" sz="900" b="1" dirty="0">
-                <a:solidFill>
-                  <a:srgbClr val="1A1A1A"/>
-                </a:solidFill>
-                <a:latin typeface="Calibri" pitchFamily="34" charset="0"/>
-                <a:ea typeface="Calibri" pitchFamily="34" charset="-122"/>
-                <a:cs typeface="Calibri" pitchFamily="34" charset="-120"/>
-              </a:rPr>
-              <a:t>Echo-chamber detection </a:t>
-            </a:r>
-            <a:pPr indent="0" marL="0">
-              <a:spcAft>
-                <a:spcPts val="100"/>
-              </a:spcAft>
-              <a:buNone/>
-            </a:pPr>
-            <a:r>
-              <a:rPr lang="en-US" sz="900" dirty="0">
+              <a:t>diffusion rate — graph-wide spread (DCR)</a:t>
+            </a:r>
+            <a:endParaRPr lang="en-US" sz="950" dirty="0"/>
+          </a:p>
+        </p:txBody>
+      </p:sp>
+      <p:sp>
+        <p:nvSpPr>
+          <p:cNvPr id="22" name="Text 20"/>
+          <p:cNvSpPr/>
+          <p:nvPr/>
+        </p:nvSpPr>
+        <p:spPr>
+          <a:xfrm>
+            <a:off x="457200" y="3182112"/>
+            <a:ext cx="960120" cy="182880"/>
+          </a:xfrm>
+          <a:prstGeom prst="rect">
+            <a:avLst/>
+          </a:prstGeom>
+          <a:noFill/>
+          <a:ln/>
+        </p:spPr>
+        <p:txBody>
+          <a:bodyPr wrap="square" lIns="0" tIns="0" rIns="0" bIns="0" rtlCol="0" anchor="ctr"/>
+          <a:lstStyle/>
+          <a:p>
+            <a:pPr algn="l" indent="0" marL="0">
+              <a:buNone/>
+            </a:pPr>
+            <a:r>
+              <a:rPr lang="en-US" sz="1000" b="1" dirty="0">
+                <a:solidFill>
+                  <a:srgbClr val="B85D2E"/>
+                </a:solidFill>
+                <a:latin typeface="Calibri" pitchFamily="34" charset="0"/>
+                <a:ea typeface="Calibri" pitchFamily="34" charset="-122"/>
+                <a:cs typeface="Calibri" pitchFamily="34" charset="-120"/>
+              </a:rPr>
+              <a:t>v</a:t>
+            </a:r>
+            <a:endParaRPr lang="en-US" sz="1000" dirty="0"/>
+          </a:p>
+        </p:txBody>
+      </p:sp>
+      <p:sp>
+        <p:nvSpPr>
+          <p:cNvPr id="23" name="Text 21"/>
+          <p:cNvSpPr/>
+          <p:nvPr/>
+        </p:nvSpPr>
+        <p:spPr>
+          <a:xfrm>
+            <a:off x="1417320" y="3182112"/>
+            <a:ext cx="4480560" cy="182880"/>
+          </a:xfrm>
+          <a:prstGeom prst="rect">
+            <a:avLst/>
+          </a:prstGeom>
+          <a:noFill/>
+          <a:ln/>
+        </p:spPr>
+        <p:txBody>
+          <a:bodyPr wrap="square" lIns="0" tIns="0" rIns="0" bIns="0" rtlCol="0" anchor="ctr"/>
+          <a:lstStyle/>
+          <a:p>
+            <a:pPr algn="l" indent="0" marL="0">
+              <a:buNone/>
+            </a:pPr>
+            <a:r>
+              <a:rPr lang="en-US" sz="950" dirty="0">
                 <a:solidFill>
                   <a:srgbClr val="303030"/>
                 </a:solidFill>
@@ -1454,158 +1752,77 @@
                 <a:ea typeface="Calibri" pitchFamily="34" charset="-122"/>
                 <a:cs typeface="Calibri" pitchFamily="34" charset="-120"/>
               </a:rPr>
-              <a:t>via interpretable signatures; networked replication of Hackenburg et al. (Science, 2025) beyond dyadic measurement</a:t>
-            </a:r>
-            <a:endParaRPr lang="en-US" sz="900" dirty="0"/>
-          </a:p>
-        </p:txBody>
-      </p:sp>
-      <p:sp>
-        <p:nvSpPr>
-          <p:cNvPr id="16" name="Text 14"/>
-          <p:cNvSpPr/>
-          <p:nvPr/>
-        </p:nvSpPr>
-        <p:spPr>
-          <a:xfrm>
-            <a:off x="457200" y="2971800"/>
-            <a:ext cx="5532120" cy="292608"/>
-          </a:xfrm>
-          <a:prstGeom prst="rect">
-            <a:avLst/>
-          </a:prstGeom>
-          <a:noFill/>
-          <a:ln/>
-        </p:spPr>
-        <p:txBody>
-          <a:bodyPr wrap="square" lIns="0" tIns="0" rIns="0" bIns="0" rtlCol="0" anchor="t"/>
-          <a:lstStyle/>
-          <a:p>
-            <a:pPr marL="342900" indent="-342900">
-              <a:spcAft>
-                <a:spcPts val="100"/>
-              </a:spcAft>
-              <a:buSzPct val="100000"/>
-              <a:buChar char="•"/>
-            </a:pPr>
-            <a:r>
-              <a:rPr lang="en-US" sz="850" b="1" dirty="0">
-                <a:solidFill>
-                  <a:srgbClr val="666666"/>
-                </a:solidFill>
-                <a:latin typeface="Calibri" pitchFamily="34" charset="0"/>
-                <a:ea typeface="Calibri" pitchFamily="34" charset="-122"/>
-                <a:cs typeface="Calibri" pitchFamily="34" charset="-120"/>
-              </a:rPr>
-              <a:t>vs. competitors: </a:t>
-            </a:r>
-            <a:pPr indent="0" marL="0">
-              <a:spcAft>
-                <a:spcPts val="100"/>
-              </a:spcAft>
-              <a:buNone/>
-            </a:pPr>
-            <a:r>
-              <a:rPr lang="en-US" sz="850" dirty="0">
-                <a:solidFill>
-                  <a:srgbClr val="666666"/>
-                </a:solidFill>
-                <a:latin typeface="Calibri" pitchFamily="34" charset="0"/>
-                <a:ea typeface="Calibri" pitchFamily="34" charset="-122"/>
-                <a:cs typeface="Calibri" pitchFamily="34" charset="-120"/>
-              </a:rPr>
-              <a:t>BRIES (Volkova), Generative-Agents, SALM lack population calibration; SINN/OPINN lack LLM coupling.</a:t>
-            </a:r>
-            <a:endParaRPr lang="en-US" sz="850" dirty="0"/>
-          </a:p>
-        </p:txBody>
-      </p:sp>
-      <p:sp>
-        <p:nvSpPr>
-          <p:cNvPr id="17" name="Text 15"/>
-          <p:cNvSpPr/>
-          <p:nvPr/>
-        </p:nvSpPr>
-        <p:spPr>
-          <a:xfrm>
-            <a:off x="457200" y="3246120"/>
-            <a:ext cx="5532120" cy="201168"/>
-          </a:xfrm>
-          <a:prstGeom prst="rect">
-            <a:avLst/>
-          </a:prstGeom>
-          <a:noFill/>
-          <a:ln/>
-        </p:spPr>
-        <p:txBody>
-          <a:bodyPr wrap="square" lIns="0" tIns="0" rIns="0" bIns="0" rtlCol="0" anchor="ctr"/>
-          <a:lstStyle/>
-          <a:p>
-            <a:pPr indent="0" marL="0">
-              <a:buNone/>
-            </a:pPr>
-            <a:r>
-              <a:rPr lang="en-US" sz="1050" b="1" i="1" dirty="0">
-                <a:solidFill>
-                  <a:srgbClr val="1F3A5F"/>
-                </a:solidFill>
-                <a:latin typeface="Calibri" pitchFamily="34" charset="0"/>
-                <a:ea typeface="Calibri" pitchFamily="34" charset="-122"/>
-                <a:cs typeface="Calibri" pitchFamily="34" charset="-120"/>
-              </a:rPr>
-              <a:t>Impact Statement</a:t>
-            </a:r>
-            <a:endParaRPr lang="en-US" sz="1050" dirty="0"/>
-          </a:p>
-        </p:txBody>
-      </p:sp>
-      <p:sp>
-        <p:nvSpPr>
-          <p:cNvPr id="18" name="Text 16"/>
-          <p:cNvSpPr/>
-          <p:nvPr/>
-        </p:nvSpPr>
-        <p:spPr>
-          <a:xfrm>
-            <a:off x="457200" y="3429000"/>
-            <a:ext cx="5532120" cy="274320"/>
-          </a:xfrm>
-          <a:prstGeom prst="rect">
-            <a:avLst/>
-          </a:prstGeom>
-          <a:noFill/>
-          <a:ln/>
-        </p:spPr>
-        <p:txBody>
-          <a:bodyPr wrap="square" lIns="0" tIns="0" rIns="0" bIns="0" rtlCol="0" anchor="t"/>
-          <a:lstStyle/>
-          <a:p>
-            <a:pPr marL="342900" indent="-342900">
-              <a:spcAft>
-                <a:spcPts val="100"/>
-              </a:spcAft>
-              <a:buSzPct val="100000"/>
-              <a:buChar char="•"/>
-            </a:pPr>
-            <a:r>
-              <a:rPr lang="en-US" sz="900" b="1" dirty="0">
-                <a:solidFill>
-                  <a:srgbClr val="1A1A1A"/>
-                </a:solidFill>
-                <a:latin typeface="Calibri" pitchFamily="34" charset="0"/>
-                <a:ea typeface="Calibri" pitchFamily="34" charset="-122"/>
-                <a:cs typeface="Calibri" pitchFamily="34" charset="-120"/>
-              </a:rPr>
-              <a:t>Aggregate-metric estimates </a:t>
-            </a:r>
-            <a:pPr indent="0" marL="0">
-              <a:spcAft>
-                <a:spcPts val="100"/>
-              </a:spcAft>
-              <a:buNone/>
-            </a:pPr>
-            <a:r>
-              <a:rPr lang="en-US" sz="900" dirty="0">
+              <a:t>convection — directional drift (DCR)</a:t>
+            </a:r>
+            <a:endParaRPr lang="en-US" sz="950" dirty="0"/>
+          </a:p>
+        </p:txBody>
+      </p:sp>
+      <p:sp>
+        <p:nvSpPr>
+          <p:cNvPr id="24" name="Text 22"/>
+          <p:cNvSpPr/>
+          <p:nvPr/>
+        </p:nvSpPr>
+        <p:spPr>
+          <a:xfrm>
+            <a:off x="457200" y="3364992"/>
+            <a:ext cx="960120" cy="182880"/>
+          </a:xfrm>
+          <a:prstGeom prst="rect">
+            <a:avLst/>
+          </a:prstGeom>
+          <a:noFill/>
+          <a:ln/>
+        </p:spPr>
+        <p:txBody>
+          <a:bodyPr wrap="square" lIns="0" tIns="0" rIns="0" bIns="0" rtlCol="0" anchor="ctr"/>
+          <a:lstStyle/>
+          <a:p>
+            <a:pPr algn="l" indent="0" marL="0">
+              <a:buNone/>
+            </a:pPr>
+            <a:r>
+              <a:rPr lang="en-US" sz="1000" b="1" dirty="0">
+                <a:solidFill>
+                  <a:srgbClr val="B85D2E"/>
+                </a:solidFill>
+                <a:latin typeface="Calibri" pitchFamily="34" charset="0"/>
+                <a:ea typeface="Calibri" pitchFamily="34" charset="-122"/>
+                <a:cs typeface="Calibri" pitchFamily="34" charset="-120"/>
+              </a:rPr>
+              <a:t>R</a:t>
+            </a:r>
+            <a:endParaRPr lang="en-US" sz="1000" dirty="0"/>
+          </a:p>
+        </p:txBody>
+      </p:sp>
+      <p:sp>
+        <p:nvSpPr>
+          <p:cNvPr id="25" name="Text 23"/>
+          <p:cNvSpPr/>
+          <p:nvPr/>
+        </p:nvSpPr>
+        <p:spPr>
+          <a:xfrm>
+            <a:off x="1417320" y="3364992"/>
+            <a:ext cx="4480560" cy="182880"/>
+          </a:xfrm>
+          <a:prstGeom prst="rect">
+            <a:avLst/>
+          </a:prstGeom>
+          <a:noFill/>
+          <a:ln/>
+        </p:spPr>
+        <p:txBody>
+          <a:bodyPr wrap="square" lIns="0" tIns="0" rIns="0" bIns="0" rtlCol="0" anchor="ctr"/>
+          <a:lstStyle/>
+          <a:p>
+            <a:pPr algn="l" indent="0" marL="0">
+              <a:buNone/>
+            </a:pPr>
+            <a:r>
+              <a:rPr lang="en-US" sz="950" dirty="0">
                 <a:solidFill>
                   <a:srgbClr val="303030"/>
                 </a:solidFill>
@@ -1613,15 +1830,15 @@
                 <a:ea typeface="Calibri" pitchFamily="34" charset="-122"/>
                 <a:cs typeface="Calibri" pitchFamily="34" charset="-120"/>
               </a:rPr>
-              <a:t>of persuasion propagation; early-warning signatures; inoculation effectiveness.</a:t>
-            </a:r>
-            <a:endParaRPr lang="en-US" sz="900" dirty="0"/>
-          </a:p>
-        </p:txBody>
-      </p:sp>
-      <p:sp>
-        <p:nvSpPr>
-          <p:cNvPr id="19" name="Text 17"/>
+              <a:t>reaction — extremism self-reinforcement (DCR)</a:t>
+            </a:r>
+            <a:endParaRPr lang="en-US" sz="950" dirty="0"/>
+          </a:p>
+        </p:txBody>
+      </p:sp>
+      <p:sp>
+        <p:nvSpPr>
+          <p:cNvPr id="26" name="Text 24"/>
           <p:cNvSpPr/>
           <p:nvPr/>
         </p:nvSpPr>
@@ -1652,7 +1869,7 @@
                 <a:ea typeface="Calibri" pitchFamily="34" charset="-122"/>
                 <a:cs typeface="Calibri" pitchFamily="34" charset="-120"/>
               </a:rPr>
-              <a:t>Project Graphic</a:t>
+              <a:t>Project Graphic — 8-step pipeline</a:t>
             </a:r>
             <a:endParaRPr lang="en-US" sz="1400" dirty="0"/>
           </a:p>
@@ -1660,59 +1877,212 @@
       </p:sp>
       <p:sp>
         <p:nvSpPr>
-          <p:cNvPr id="20" name="Text 18"/>
-          <p:cNvSpPr/>
-          <p:nvPr/>
-        </p:nvSpPr>
-        <p:spPr>
-          <a:xfrm>
-            <a:off x="6309360" y="1353312"/>
-            <a:ext cx="5349240" cy="329184"/>
-          </a:xfrm>
-          <a:prstGeom prst="rect">
-            <a:avLst/>
-          </a:prstGeom>
-          <a:noFill/>
-          <a:ln/>
-        </p:spPr>
-        <p:txBody>
-          <a:bodyPr wrap="square" lIns="0" tIns="0" rIns="0" bIns="0" rtlCol="0" anchor="t"/>
+          <p:cNvPr id="27" name="Shape 25"/>
+          <p:cNvSpPr/>
+          <p:nvPr/>
+        </p:nvSpPr>
+        <p:spPr>
+          <a:xfrm>
+            <a:off x="6263640" y="1371600"/>
+            <a:ext cx="2683764" cy="237744"/>
+          </a:xfrm>
+          <a:prstGeom prst="rect">
+            <a:avLst/>
+          </a:prstGeom>
+          <a:solidFill>
+            <a:srgbClr val="F5F5F5"/>
+          </a:solidFill>
+          <a:ln w="6350">
+            <a:solidFill>
+              <a:srgbClr val="1F3A5F"/>
+            </a:solidFill>
+            <a:prstDash val="solid"/>
+          </a:ln>
+        </p:spPr>
+      </p:sp>
+      <p:sp>
+        <p:nvSpPr>
+          <p:cNvPr id="28" name="Text 26"/>
+          <p:cNvSpPr/>
+          <p:nvPr/>
+        </p:nvSpPr>
+        <p:spPr>
+          <a:xfrm>
+            <a:off x="6263640" y="1371600"/>
+            <a:ext cx="2683764" cy="237744"/>
+          </a:xfrm>
+          <a:prstGeom prst="rect">
+            <a:avLst/>
+          </a:prstGeom>
+          <a:noFill/>
+          <a:ln/>
+        </p:spPr>
+        <p:txBody>
+          <a:bodyPr wrap="square" lIns="0" tIns="0" rIns="0" bIns="0" rtlCol="0" anchor="ctr"/>
           <a:lstStyle/>
           <a:p>
             <a:pPr algn="ctr" indent="0" marL="0">
               <a:buNone/>
             </a:pPr>
             <a:r>
-              <a:rPr lang="en-US" sz="950" i="1" dirty="0">
-                <a:solidFill>
-                  <a:srgbClr val="303030"/>
-                </a:solidFill>
-                <a:latin typeface="Calibri" pitchFamily="34" charset="0"/>
-                <a:ea typeface="Calibri" pitchFamily="34" charset="-122"/>
-                <a:cs typeface="Calibri" pitchFamily="34" charset="-120"/>
-              </a:rPr>
-              <a:t>Five-stage pipeline. Stage 4 (calibrate) is the gate that turns the agent population into a validated test environment.</a:t>
-            </a:r>
-            <a:endParaRPr lang="en-US" sz="950" dirty="0"/>
-          </a:p>
-        </p:txBody>
-      </p:sp>
-      <p:sp>
-        <p:nvSpPr>
-          <p:cNvPr id="21" name="Shape 19"/>
-          <p:cNvSpPr/>
-          <p:nvPr/>
-        </p:nvSpPr>
-        <p:spPr>
-          <a:xfrm>
-            <a:off x="6309360" y="1764792"/>
-            <a:ext cx="1011326" cy="1005840"/>
+              <a:rPr lang="en-US" sz="900" b="1" i="1" dirty="0">
+                <a:solidFill>
+                  <a:srgbClr val="1F3A5F"/>
+                </a:solidFill>
+                <a:latin typeface="Calibri" pitchFamily="34" charset="0"/>
+                <a:ea typeface="Calibri" pitchFamily="34" charset="-122"/>
+                <a:cs typeface="Calibri" pitchFamily="34" charset="-120"/>
+              </a:rPr>
+              <a:t>Real-world measuring stick</a:t>
+            </a:r>
+            <a:endParaRPr lang="en-US" sz="900" dirty="0"/>
+          </a:p>
+        </p:txBody>
+      </p:sp>
+      <p:sp>
+        <p:nvSpPr>
+          <p:cNvPr id="29" name="Shape 27"/>
+          <p:cNvSpPr/>
+          <p:nvPr/>
+        </p:nvSpPr>
+        <p:spPr>
+          <a:xfrm>
+            <a:off x="8983980" y="1371600"/>
+            <a:ext cx="1323594" cy="237744"/>
+          </a:xfrm>
+          <a:prstGeom prst="rect">
+            <a:avLst/>
+          </a:prstGeom>
+          <a:solidFill>
+            <a:srgbClr val="1F3A5F"/>
+          </a:solidFill>
+          <a:ln w="6350">
+            <a:solidFill>
+              <a:srgbClr val="1F3A5F"/>
+            </a:solidFill>
+            <a:prstDash val="solid"/>
+          </a:ln>
+        </p:spPr>
+      </p:sp>
+      <p:sp>
+        <p:nvSpPr>
+          <p:cNvPr id="30" name="Text 28"/>
+          <p:cNvSpPr/>
+          <p:nvPr/>
+        </p:nvSpPr>
+        <p:spPr>
+          <a:xfrm>
+            <a:off x="8983980" y="1371600"/>
+            <a:ext cx="1323594" cy="237744"/>
+          </a:xfrm>
+          <a:prstGeom prst="rect">
+            <a:avLst/>
+          </a:prstGeom>
+          <a:noFill/>
+          <a:ln/>
+        </p:spPr>
+        <p:txBody>
+          <a:bodyPr wrap="square" lIns="0" tIns="0" rIns="0" bIns="0" rtlCol="0" anchor="ctr"/>
+          <a:lstStyle/>
+          <a:p>
+            <a:pPr algn="ctr" indent="0" marL="0">
+              <a:buNone/>
+            </a:pPr>
+            <a:r>
+              <a:rPr lang="en-US" sz="900" b="1" i="1" dirty="0">
+                <a:solidFill>
+                  <a:srgbClr val="FFFFFF"/>
+                </a:solidFill>
+                <a:latin typeface="Calibri" pitchFamily="34" charset="0"/>
+                <a:ea typeface="Calibri" pitchFamily="34" charset="-122"/>
+                <a:cs typeface="Calibri" pitchFamily="34" charset="-120"/>
+              </a:rPr>
+              <a:t>Scale model + calibration</a:t>
+            </a:r>
+            <a:endParaRPr lang="en-US" sz="900" dirty="0"/>
+          </a:p>
+        </p:txBody>
+      </p:sp>
+      <p:sp>
+        <p:nvSpPr>
+          <p:cNvPr id="31" name="Shape 29"/>
+          <p:cNvSpPr/>
+          <p:nvPr/>
+        </p:nvSpPr>
+        <p:spPr>
+          <a:xfrm>
+            <a:off x="10344150" y="1371600"/>
+            <a:ext cx="1360170" cy="237744"/>
           </a:xfrm>
           <a:prstGeom prst="rect">
             <a:avLst/>
           </a:prstGeom>
           <a:solidFill>
             <a:srgbClr val="F5F5F5"/>
+          </a:solidFill>
+          <a:ln w="6350">
+            <a:solidFill>
+              <a:srgbClr val="1F3A5F"/>
+            </a:solidFill>
+            <a:prstDash val="solid"/>
+          </a:ln>
+        </p:spPr>
+      </p:sp>
+      <p:sp>
+        <p:nvSpPr>
+          <p:cNvPr id="32" name="Text 30"/>
+          <p:cNvSpPr/>
+          <p:nvPr/>
+        </p:nvSpPr>
+        <p:spPr>
+          <a:xfrm>
+            <a:off x="10344150" y="1371600"/>
+            <a:ext cx="1360170" cy="237744"/>
+          </a:xfrm>
+          <a:prstGeom prst="rect">
+            <a:avLst/>
+          </a:prstGeom>
+          <a:noFill/>
+          <a:ln/>
+        </p:spPr>
+        <p:txBody>
+          <a:bodyPr wrap="square" lIns="0" tIns="0" rIns="0" bIns="0" rtlCol="0" anchor="ctr"/>
+          <a:lstStyle/>
+          <a:p>
+            <a:pPr algn="ctr" indent="0" marL="0">
+              <a:buNone/>
+            </a:pPr>
+            <a:r>
+              <a:rPr lang="en-US" sz="900" b="1" i="1" dirty="0">
+                <a:solidFill>
+                  <a:srgbClr val="1F3A5F"/>
+                </a:solidFill>
+                <a:latin typeface="Calibri" pitchFamily="34" charset="0"/>
+                <a:ea typeface="Calibri" pitchFamily="34" charset="-122"/>
+                <a:cs typeface="Calibri" pitchFamily="34" charset="-120"/>
+              </a:rPr>
+              <a:t>Experiments</a:t>
+            </a:r>
+            <a:endParaRPr lang="en-US" sz="900" dirty="0"/>
+          </a:p>
+        </p:txBody>
+      </p:sp>
+      <p:sp>
+        <p:nvSpPr>
+          <p:cNvPr id="33" name="Shape 31"/>
+          <p:cNvSpPr/>
+          <p:nvPr/>
+        </p:nvSpPr>
+        <p:spPr>
+          <a:xfrm>
+            <a:off x="6263640" y="1645920"/>
+            <a:ext cx="648081" cy="960120"/>
+          </a:xfrm>
+          <a:prstGeom prst="rect">
+            <a:avLst/>
+          </a:prstGeom>
+          <a:solidFill>
+            <a:srgbClr val="FAFAFA"/>
           </a:solidFill>
           <a:ln w="12700">
             <a:solidFill>
@@ -1724,14 +2094,14 @@
       </p:sp>
       <p:sp>
         <p:nvSpPr>
-          <p:cNvPr id="22" name="Text 20"/>
-          <p:cNvSpPr/>
-          <p:nvPr/>
-        </p:nvSpPr>
-        <p:spPr>
-          <a:xfrm>
-            <a:off x="6309360" y="1819656"/>
-            <a:ext cx="1011326" cy="219456"/>
+          <p:cNvPr id="34" name="Text 32"/>
+          <p:cNvSpPr/>
+          <p:nvPr/>
+        </p:nvSpPr>
+        <p:spPr>
+          <a:xfrm>
+            <a:off x="6263640" y="1682496"/>
+            <a:ext cx="648081" cy="228600"/>
           </a:xfrm>
           <a:prstGeom prst="rect">
             <a:avLst/>
@@ -1747,7 +2117,7 @@
               <a:buNone/>
             </a:pPr>
             <a:r>
-              <a:rPr lang="en-US" sz="1100" b="1" dirty="0">
+              <a:rPr lang="en-US" sz="1200" b="1" dirty="0">
                 <a:solidFill>
                   <a:srgbClr val="1F3A5F"/>
                 </a:solidFill>
@@ -1755,22 +2125,22 @@
                 <a:ea typeface="Calibri" pitchFamily="34" charset="-122"/>
                 <a:cs typeface="Calibri" pitchFamily="34" charset="-120"/>
               </a:rPr>
-              <a:t>Real Data</a:t>
-            </a:r>
-            <a:endParaRPr lang="en-US" sz="1100" dirty="0"/>
-          </a:p>
-        </p:txBody>
-      </p:sp>
-      <p:sp>
-        <p:nvSpPr>
-          <p:cNvPr id="23" name="Text 21"/>
-          <p:cNvSpPr/>
-          <p:nvPr/>
-        </p:nvSpPr>
-        <p:spPr>
-          <a:xfrm>
-            <a:off x="6345936" y="2057400"/>
-            <a:ext cx="938174" cy="256032"/>
+              <a:t>1</a:t>
+            </a:r>
+            <a:endParaRPr lang="en-US" sz="1200" dirty="0"/>
+          </a:p>
+        </p:txBody>
+      </p:sp>
+      <p:sp>
+        <p:nvSpPr>
+          <p:cNvPr id="35" name="Text 33"/>
+          <p:cNvSpPr/>
+          <p:nvPr/>
+        </p:nvSpPr>
+        <p:spPr>
+          <a:xfrm>
+            <a:off x="6281928" y="1938528"/>
+            <a:ext cx="611505" cy="310896"/>
           </a:xfrm>
           <a:prstGeom prst="rect">
             <a:avLst/>
@@ -1786,7 +2156,46 @@
               <a:buNone/>
             </a:pPr>
             <a:r>
-              <a:rPr lang="en-US" sz="900" i="1" dirty="0">
+              <a:rPr lang="en-US" sz="900" b="1" dirty="0">
+                <a:solidFill>
+                  <a:srgbClr val="1F3A5F"/>
+                </a:solidFill>
+                <a:latin typeface="Calibri" pitchFamily="34" charset="0"/>
+                <a:ea typeface="Calibri" pitchFamily="34" charset="-122"/>
+                <a:cs typeface="Calibri" pitchFamily="34" charset="-120"/>
+              </a:rPr>
+              <a:t>Pull data</a:t>
+            </a:r>
+            <a:endParaRPr lang="en-US" sz="900" dirty="0"/>
+          </a:p>
+        </p:txBody>
+      </p:sp>
+      <p:sp>
+        <p:nvSpPr>
+          <p:cNvPr id="36" name="Text 34"/>
+          <p:cNvSpPr/>
+          <p:nvPr/>
+        </p:nvSpPr>
+        <p:spPr>
+          <a:xfrm>
+            <a:off x="6281928" y="2249424"/>
+            <a:ext cx="611505" cy="329184"/>
+          </a:xfrm>
+          <a:prstGeom prst="rect">
+            <a:avLst/>
+          </a:prstGeom>
+          <a:noFill/>
+          <a:ln/>
+        </p:spPr>
+        <p:txBody>
+          <a:bodyPr wrap="square" lIns="0" tIns="0" rIns="0" bIns="0" rtlCol="0" anchor="ctr"/>
+          <a:lstStyle/>
+          <a:p>
+            <a:pPr algn="ctr" indent="0" marL="0">
+              <a:buNone/>
+            </a:pPr>
+            <a:r>
+              <a:rPr lang="en-US" sz="800" i="1" dirty="0">
                 <a:solidFill>
                   <a:srgbClr val="666666"/>
                 </a:solidFill>
@@ -1794,46 +2203,7 @@
                 <a:ea typeface="Calibri" pitchFamily="34" charset="-122"/>
                 <a:cs typeface="Calibri" pitchFamily="34" charset="-120"/>
               </a:rPr>
-              <a:t>Reddit / G45</a:t>
-            </a:r>
-            <a:endParaRPr lang="en-US" sz="900" dirty="0"/>
-          </a:p>
-        </p:txBody>
-      </p:sp>
-      <p:sp>
-        <p:nvSpPr>
-          <p:cNvPr id="24" name="Text 22"/>
-          <p:cNvSpPr/>
-          <p:nvPr/>
-        </p:nvSpPr>
-        <p:spPr>
-          <a:xfrm>
-            <a:off x="6345936" y="2331720"/>
-            <a:ext cx="938174" cy="384048"/>
-          </a:xfrm>
-          <a:prstGeom prst="rect">
-            <a:avLst/>
-          </a:prstGeom>
-          <a:noFill/>
-          <a:ln/>
-        </p:spPr>
-        <p:txBody>
-          <a:bodyPr wrap="square" lIns="0" tIns="0" rIns="0" bIns="0" rtlCol="0" anchor="ctr"/>
-          <a:lstStyle/>
-          <a:p>
-            <a:pPr algn="ctr" indent="0" marL="0">
-              <a:buNone/>
-            </a:pPr>
-            <a:r>
-              <a:rPr lang="en-US" sz="800" dirty="0">
-                <a:solidFill>
-                  <a:srgbClr val="303030"/>
-                </a:solidFill>
-                <a:latin typeface="Calibri" pitchFamily="34" charset="0"/>
-                <a:ea typeface="Calibri" pitchFamily="34" charset="-122"/>
-                <a:cs typeface="Calibri" pitchFamily="34" charset="-120"/>
-              </a:rPr>
-              <a:t>u_i(t), graph</a:t>
+              <a:t>r/Brexit</a:t>
             </a:r>
             <a:endParaRPr lang="en-US" sz="800" dirty="0"/>
           </a:p>
@@ -1841,59 +2211,20 @@
       </p:sp>
       <p:sp>
         <p:nvSpPr>
-          <p:cNvPr id="25" name="Text 23"/>
-          <p:cNvSpPr/>
-          <p:nvPr/>
-        </p:nvSpPr>
-        <p:spPr>
-          <a:xfrm>
-            <a:off x="7284110" y="2121408"/>
-            <a:ext cx="146304" cy="292608"/>
-          </a:xfrm>
-          <a:prstGeom prst="rect">
-            <a:avLst/>
-          </a:prstGeom>
-          <a:noFill/>
-          <a:ln/>
-        </p:spPr>
-        <p:txBody>
-          <a:bodyPr wrap="square" lIns="0" tIns="0" rIns="0" bIns="0" rtlCol="0" anchor="ctr"/>
-          <a:lstStyle/>
-          <a:p>
-            <a:pPr algn="ctr" indent="0" marL="0">
-              <a:buNone/>
-            </a:pPr>
-            <a:r>
-              <a:rPr lang="en-US" sz="1000" b="1" dirty="0">
-                <a:solidFill>
-                  <a:srgbClr val="1F3A5F"/>
-                </a:solidFill>
-                <a:latin typeface="Calibri" pitchFamily="34" charset="0"/>
-                <a:ea typeface="Calibri" pitchFamily="34" charset="-122"/>
-                <a:cs typeface="Calibri" pitchFamily="34" charset="-120"/>
-              </a:rPr>
-              <a:t>▶</a:t>
-            </a:r>
-            <a:endParaRPr lang="en-US" sz="1000" dirty="0"/>
-          </a:p>
-        </p:txBody>
-      </p:sp>
-      <p:sp>
-        <p:nvSpPr>
-          <p:cNvPr id="26" name="Shape 24"/>
-          <p:cNvSpPr/>
-          <p:nvPr/>
-        </p:nvSpPr>
-        <p:spPr>
-          <a:xfrm>
-            <a:off x="7393838" y="1764792"/>
-            <a:ext cx="1011326" cy="1005840"/>
-          </a:xfrm>
-          <a:prstGeom prst="rect">
-            <a:avLst/>
-          </a:prstGeom>
-          <a:solidFill>
-            <a:srgbClr val="F5F5F5"/>
+          <p:cNvPr id="37" name="Shape 35"/>
+          <p:cNvSpPr/>
+          <p:nvPr/>
+        </p:nvSpPr>
+        <p:spPr>
+          <a:xfrm>
+            <a:off x="6948297" y="1645920"/>
+            <a:ext cx="648081" cy="960120"/>
+          </a:xfrm>
+          <a:prstGeom prst="rect">
+            <a:avLst/>
+          </a:prstGeom>
+          <a:solidFill>
+            <a:srgbClr val="FAFAFA"/>
           </a:solidFill>
           <a:ln w="12700">
             <a:solidFill>
@@ -1905,14 +2236,14 @@
       </p:sp>
       <p:sp>
         <p:nvSpPr>
-          <p:cNvPr id="27" name="Text 25"/>
-          <p:cNvSpPr/>
-          <p:nvPr/>
-        </p:nvSpPr>
-        <p:spPr>
-          <a:xfrm>
-            <a:off x="7393838" y="1819656"/>
-            <a:ext cx="1011326" cy="219456"/>
+          <p:cNvPr id="38" name="Text 36"/>
+          <p:cNvSpPr/>
+          <p:nvPr/>
+        </p:nvSpPr>
+        <p:spPr>
+          <a:xfrm>
+            <a:off x="6948297" y="1682496"/>
+            <a:ext cx="648081" cy="228600"/>
           </a:xfrm>
           <a:prstGeom prst="rect">
             <a:avLst/>
@@ -1928,7 +2259,7 @@
               <a:buNone/>
             </a:pPr>
             <a:r>
-              <a:rPr lang="en-US" sz="1100" b="1" dirty="0">
+              <a:rPr lang="en-US" sz="1200" b="1" dirty="0">
                 <a:solidFill>
                   <a:srgbClr val="1F3A5F"/>
                 </a:solidFill>
@@ -1936,22 +2267,22 @@
                 <a:ea typeface="Calibri" pitchFamily="34" charset="-122"/>
                 <a:cs typeface="Calibri" pitchFamily="34" charset="-120"/>
               </a:rPr>
-              <a:t>PINN Fit</a:t>
-            </a:r>
-            <a:endParaRPr lang="en-US" sz="1100" dirty="0"/>
-          </a:p>
-        </p:txBody>
-      </p:sp>
-      <p:sp>
-        <p:nvSpPr>
-          <p:cNvPr id="28" name="Text 26"/>
-          <p:cNvSpPr/>
-          <p:nvPr/>
-        </p:nvSpPr>
-        <p:spPr>
-          <a:xfrm>
-            <a:off x="7430414" y="2057400"/>
-            <a:ext cx="938174" cy="256032"/>
+              <a:t>2</a:t>
+            </a:r>
+            <a:endParaRPr lang="en-US" sz="1200" dirty="0"/>
+          </a:p>
+        </p:txBody>
+      </p:sp>
+      <p:sp>
+        <p:nvSpPr>
+          <p:cNvPr id="39" name="Text 37"/>
+          <p:cNvSpPr/>
+          <p:nvPr/>
+        </p:nvSpPr>
+        <p:spPr>
+          <a:xfrm>
+            <a:off x="6966585" y="1938528"/>
+            <a:ext cx="611505" cy="310896"/>
           </a:xfrm>
           <a:prstGeom prst="rect">
             <a:avLst/>
@@ -1967,7 +2298,46 @@
               <a:buNone/>
             </a:pPr>
             <a:r>
-              <a:rPr lang="en-US" sz="900" i="1" dirty="0">
+              <a:rPr lang="en-US" sz="900" b="1" dirty="0">
+                <a:solidFill>
+                  <a:srgbClr val="1F3A5F"/>
+                </a:solidFill>
+                <a:latin typeface="Calibri" pitchFamily="34" charset="0"/>
+                <a:ea typeface="Calibri" pitchFamily="34" charset="-122"/>
+                <a:cs typeface="Calibri" pitchFamily="34" charset="-120"/>
+              </a:rPr>
+              <a:t>Score stances</a:t>
+            </a:r>
+            <a:endParaRPr lang="en-US" sz="900" dirty="0"/>
+          </a:p>
+        </p:txBody>
+      </p:sp>
+      <p:sp>
+        <p:nvSpPr>
+          <p:cNvPr id="40" name="Text 38"/>
+          <p:cNvSpPr/>
+          <p:nvPr/>
+        </p:nvSpPr>
+        <p:spPr>
+          <a:xfrm>
+            <a:off x="6966585" y="2249424"/>
+            <a:ext cx="611505" cy="329184"/>
+          </a:xfrm>
+          <a:prstGeom prst="rect">
+            <a:avLst/>
+          </a:prstGeom>
+          <a:noFill/>
+          <a:ln/>
+        </p:spPr>
+        <p:txBody>
+          <a:bodyPr wrap="square" lIns="0" tIns="0" rIns="0" bIns="0" rtlCol="0" anchor="ctr"/>
+          <a:lstStyle/>
+          <a:p>
+            <a:pPr algn="ctr" indent="0" marL="0">
+              <a:buNone/>
+            </a:pPr>
+            <a:r>
+              <a:rPr lang="en-US" sz="800" i="1" dirty="0">
                 <a:solidFill>
                   <a:srgbClr val="666666"/>
                 </a:solidFill>
@@ -1975,46 +2345,7 @@
                 <a:ea typeface="Calibri" pitchFamily="34" charset="-122"/>
                 <a:cs typeface="Calibri" pitchFamily="34" charset="-120"/>
               </a:rPr>
-              <a:t>α, ε, D, v, R</a:t>
-            </a:r>
-            <a:endParaRPr lang="en-US" sz="900" dirty="0"/>
-          </a:p>
-        </p:txBody>
-      </p:sp>
-      <p:sp>
-        <p:nvSpPr>
-          <p:cNvPr id="29" name="Text 27"/>
-          <p:cNvSpPr/>
-          <p:nvPr/>
-        </p:nvSpPr>
-        <p:spPr>
-          <a:xfrm>
-            <a:off x="7430414" y="2331720"/>
-            <a:ext cx="938174" cy="384048"/>
-          </a:xfrm>
-          <a:prstGeom prst="rect">
-            <a:avLst/>
-          </a:prstGeom>
-          <a:noFill/>
-          <a:ln/>
-        </p:spPr>
-        <p:txBody>
-          <a:bodyPr wrap="square" lIns="0" tIns="0" rIns="0" bIns="0" rtlCol="0" anchor="ctr"/>
-          <a:lstStyle/>
-          <a:p>
-            <a:pPr algn="ctr" indent="0" marL="0">
-              <a:buNone/>
-            </a:pPr>
-            <a:r>
-              <a:rPr lang="en-US" sz="800" dirty="0">
-                <a:solidFill>
-                  <a:srgbClr val="303030"/>
-                </a:solidFill>
-                <a:latin typeface="Calibri" pitchFamily="34" charset="0"/>
-                <a:ea typeface="Calibri" pitchFamily="34" charset="-122"/>
-                <a:cs typeface="Calibri" pitchFamily="34" charset="-120"/>
-              </a:rPr>
-              <a:t>Coeff. fingerprint</a:t>
+              <a:t>RoBERTa</a:t>
             </a:r>
             <a:endParaRPr lang="en-US" sz="800" dirty="0"/>
           </a:p>
@@ -2022,59 +2353,20 @@
       </p:sp>
       <p:sp>
         <p:nvSpPr>
-          <p:cNvPr id="30" name="Text 28"/>
-          <p:cNvSpPr/>
-          <p:nvPr/>
-        </p:nvSpPr>
-        <p:spPr>
-          <a:xfrm>
-            <a:off x="8368589" y="2121408"/>
-            <a:ext cx="146304" cy="292608"/>
-          </a:xfrm>
-          <a:prstGeom prst="rect">
-            <a:avLst/>
-          </a:prstGeom>
-          <a:noFill/>
-          <a:ln/>
-        </p:spPr>
-        <p:txBody>
-          <a:bodyPr wrap="square" lIns="0" tIns="0" rIns="0" bIns="0" rtlCol="0" anchor="ctr"/>
-          <a:lstStyle/>
-          <a:p>
-            <a:pPr algn="ctr" indent="0" marL="0">
-              <a:buNone/>
-            </a:pPr>
-            <a:r>
-              <a:rPr lang="en-US" sz="1000" b="1" dirty="0">
-                <a:solidFill>
-                  <a:srgbClr val="1F3A5F"/>
-                </a:solidFill>
-                <a:latin typeface="Calibri" pitchFamily="34" charset="0"/>
-                <a:ea typeface="Calibri" pitchFamily="34" charset="-122"/>
-                <a:cs typeface="Calibri" pitchFamily="34" charset="-120"/>
-              </a:rPr>
-              <a:t>▶</a:t>
-            </a:r>
-            <a:endParaRPr lang="en-US" sz="1000" dirty="0"/>
-          </a:p>
-        </p:txBody>
-      </p:sp>
-      <p:sp>
-        <p:nvSpPr>
-          <p:cNvPr id="31" name="Shape 29"/>
-          <p:cNvSpPr/>
-          <p:nvPr/>
-        </p:nvSpPr>
-        <p:spPr>
-          <a:xfrm>
-            <a:off x="8478317" y="1764792"/>
-            <a:ext cx="1011326" cy="1005840"/>
-          </a:xfrm>
-          <a:prstGeom prst="rect">
-            <a:avLst/>
-          </a:prstGeom>
-          <a:solidFill>
-            <a:srgbClr val="F5F5F5"/>
+          <p:cNvPr id="41" name="Shape 39"/>
+          <p:cNvSpPr/>
+          <p:nvPr/>
+        </p:nvSpPr>
+        <p:spPr>
+          <a:xfrm>
+            <a:off x="7632954" y="1645920"/>
+            <a:ext cx="648081" cy="960120"/>
+          </a:xfrm>
+          <a:prstGeom prst="rect">
+            <a:avLst/>
+          </a:prstGeom>
+          <a:solidFill>
+            <a:srgbClr val="FAFAFA"/>
           </a:solidFill>
           <a:ln w="12700">
             <a:solidFill>
@@ -2086,14 +2378,14 @@
       </p:sp>
       <p:sp>
         <p:nvSpPr>
-          <p:cNvPr id="32" name="Text 30"/>
-          <p:cNvSpPr/>
-          <p:nvPr/>
-        </p:nvSpPr>
-        <p:spPr>
-          <a:xfrm>
-            <a:off x="8478317" y="1819656"/>
-            <a:ext cx="1011326" cy="219456"/>
+          <p:cNvPr id="42" name="Text 40"/>
+          <p:cNvSpPr/>
+          <p:nvPr/>
+        </p:nvSpPr>
+        <p:spPr>
+          <a:xfrm>
+            <a:off x="7632954" y="1682496"/>
+            <a:ext cx="648081" cy="228600"/>
           </a:xfrm>
           <a:prstGeom prst="rect">
             <a:avLst/>
@@ -2109,7 +2401,7 @@
               <a:buNone/>
             </a:pPr>
             <a:r>
-              <a:rPr lang="en-US" sz="1100" b="1" dirty="0">
+              <a:rPr lang="en-US" sz="1200" b="1" dirty="0">
                 <a:solidFill>
                   <a:srgbClr val="1F3A5F"/>
                 </a:solidFill>
@@ -2117,22 +2409,22 @@
                 <a:ea typeface="Calibri" pitchFamily="34" charset="-122"/>
                 <a:cs typeface="Calibri" pitchFamily="34" charset="-120"/>
               </a:rPr>
-              <a:t>Agent Pop.</a:t>
-            </a:r>
-            <a:endParaRPr lang="en-US" sz="1100" dirty="0"/>
-          </a:p>
-        </p:txBody>
-      </p:sp>
-      <p:sp>
-        <p:nvSpPr>
-          <p:cNvPr id="33" name="Text 31"/>
-          <p:cNvSpPr/>
-          <p:nvPr/>
-        </p:nvSpPr>
-        <p:spPr>
-          <a:xfrm>
-            <a:off x="8514893" y="2057400"/>
-            <a:ext cx="938174" cy="256032"/>
+              <a:t>3</a:t>
+            </a:r>
+            <a:endParaRPr lang="en-US" sz="1200" dirty="0"/>
+          </a:p>
+        </p:txBody>
+      </p:sp>
+      <p:sp>
+        <p:nvSpPr>
+          <p:cNvPr id="43" name="Text 41"/>
+          <p:cNvSpPr/>
+          <p:nvPr/>
+        </p:nvSpPr>
+        <p:spPr>
+          <a:xfrm>
+            <a:off x="7651242" y="1938528"/>
+            <a:ext cx="611505" cy="310896"/>
           </a:xfrm>
           <a:prstGeom prst="rect">
             <a:avLst/>
@@ -2148,7 +2440,46 @@
               <a:buNone/>
             </a:pPr>
             <a:r>
-              <a:rPr lang="en-US" sz="900" i="1" dirty="0">
+              <a:rPr lang="en-US" sz="900" b="1" dirty="0">
+                <a:solidFill>
+                  <a:srgbClr val="1F3A5F"/>
+                </a:solidFill>
+                <a:latin typeface="Calibri" pitchFamily="34" charset="0"/>
+                <a:ea typeface="Calibri" pitchFamily="34" charset="-122"/>
+                <a:cs typeface="Calibri" pitchFamily="34" charset="-120"/>
+              </a:rPr>
+              <a:t>Build graph</a:t>
+            </a:r>
+            <a:endParaRPr lang="en-US" sz="900" dirty="0"/>
+          </a:p>
+        </p:txBody>
+      </p:sp>
+      <p:sp>
+        <p:nvSpPr>
+          <p:cNvPr id="44" name="Text 42"/>
+          <p:cNvSpPr/>
+          <p:nvPr/>
+        </p:nvSpPr>
+        <p:spPr>
+          <a:xfrm>
+            <a:off x="7651242" y="2249424"/>
+            <a:ext cx="611505" cy="329184"/>
+          </a:xfrm>
+          <a:prstGeom prst="rect">
+            <a:avLst/>
+          </a:prstGeom>
+          <a:noFill/>
+          <a:ln/>
+        </p:spPr>
+        <p:txBody>
+          <a:bodyPr wrap="square" lIns="0" tIns="0" rIns="0" bIns="0" rtlCol="0" anchor="ctr"/>
+          <a:lstStyle/>
+          <a:p>
+            <a:pPr algn="ctr" indent="0" marL="0">
+              <a:buNone/>
+            </a:pPr>
+            <a:r>
+              <a:rPr lang="en-US" sz="800" i="1" dirty="0">
                 <a:solidFill>
                   <a:srgbClr val="666666"/>
                 </a:solidFill>
@@ -2156,46 +2487,7 @@
                 <a:ea typeface="Calibri" pitchFamily="34" charset="-122"/>
                 <a:cs typeface="Calibri" pitchFamily="34" charset="-120"/>
               </a:rPr>
-              <a:t>LLM personas</a:t>
-            </a:r>
-            <a:endParaRPr lang="en-US" sz="900" dirty="0"/>
-          </a:p>
-        </p:txBody>
-      </p:sp>
-      <p:sp>
-        <p:nvSpPr>
-          <p:cNvPr id="34" name="Text 32"/>
-          <p:cNvSpPr/>
-          <p:nvPr/>
-        </p:nvSpPr>
-        <p:spPr>
-          <a:xfrm>
-            <a:off x="8514893" y="2331720"/>
-            <a:ext cx="938174" cy="384048"/>
-          </a:xfrm>
-          <a:prstGeom prst="rect">
-            <a:avLst/>
-          </a:prstGeom>
-          <a:noFill/>
-          <a:ln/>
-        </p:spPr>
-        <p:txBody>
-          <a:bodyPr wrap="square" lIns="0" tIns="0" rIns="0" bIns="0" rtlCol="0" anchor="ctr"/>
-          <a:lstStyle/>
-          <a:p>
-            <a:pPr algn="ctr" indent="0" marL="0">
-              <a:buNone/>
-            </a:pPr>
-            <a:r>
-              <a:rPr lang="en-US" sz="800" dirty="0">
-                <a:solidFill>
-                  <a:srgbClr val="303030"/>
-                </a:solidFill>
-                <a:latin typeface="Calibri" pitchFamily="34" charset="0"/>
-                <a:ea typeface="Calibri" pitchFamily="34" charset="-122"/>
-                <a:cs typeface="Calibri" pitchFamily="34" charset="-120"/>
-              </a:rPr>
-              <a:t>Networked sim</a:t>
+              <a:t>reply edges</a:t>
             </a:r>
             <a:endParaRPr lang="en-US" sz="800" dirty="0"/>
           </a:p>
@@ -2203,59 +2495,20 @@
       </p:sp>
       <p:sp>
         <p:nvSpPr>
-          <p:cNvPr id="35" name="Text 33"/>
-          <p:cNvSpPr/>
-          <p:nvPr/>
-        </p:nvSpPr>
-        <p:spPr>
-          <a:xfrm>
-            <a:off x="9453067" y="2121408"/>
-            <a:ext cx="146304" cy="292608"/>
-          </a:xfrm>
-          <a:prstGeom prst="rect">
-            <a:avLst/>
-          </a:prstGeom>
-          <a:noFill/>
-          <a:ln/>
-        </p:spPr>
-        <p:txBody>
-          <a:bodyPr wrap="square" lIns="0" tIns="0" rIns="0" bIns="0" rtlCol="0" anchor="ctr"/>
-          <a:lstStyle/>
-          <a:p>
-            <a:pPr algn="ctr" indent="0" marL="0">
-              <a:buNone/>
-            </a:pPr>
-            <a:r>
-              <a:rPr lang="en-US" sz="1000" b="1" dirty="0">
-                <a:solidFill>
-                  <a:srgbClr val="1F3A5F"/>
-                </a:solidFill>
-                <a:latin typeface="Calibri" pitchFamily="34" charset="0"/>
-                <a:ea typeface="Calibri" pitchFamily="34" charset="-122"/>
-                <a:cs typeface="Calibri" pitchFamily="34" charset="-120"/>
-              </a:rPr>
-              <a:t>▶</a:t>
-            </a:r>
-            <a:endParaRPr lang="en-US" sz="1000" dirty="0"/>
-          </a:p>
-        </p:txBody>
-      </p:sp>
-      <p:sp>
-        <p:nvSpPr>
-          <p:cNvPr id="36" name="Shape 34"/>
-          <p:cNvSpPr/>
-          <p:nvPr/>
-        </p:nvSpPr>
-        <p:spPr>
-          <a:xfrm>
-            <a:off x="9562795" y="1764792"/>
-            <a:ext cx="1011326" cy="1005840"/>
-          </a:xfrm>
-          <a:prstGeom prst="rect">
-            <a:avLst/>
-          </a:prstGeom>
-          <a:solidFill>
-            <a:srgbClr val="1F3A5F"/>
+          <p:cNvPr id="45" name="Shape 43"/>
+          <p:cNvSpPr/>
+          <p:nvPr/>
+        </p:nvSpPr>
+        <p:spPr>
+          <a:xfrm>
+            <a:off x="8317611" y="1645920"/>
+            <a:ext cx="648081" cy="960120"/>
+          </a:xfrm>
+          <a:prstGeom prst="rect">
+            <a:avLst/>
+          </a:prstGeom>
+          <a:solidFill>
+            <a:srgbClr val="FAFAFA"/>
           </a:solidFill>
           <a:ln w="12700">
             <a:solidFill>
@@ -2267,14 +2520,14 @@
       </p:sp>
       <p:sp>
         <p:nvSpPr>
-          <p:cNvPr id="37" name="Text 35"/>
-          <p:cNvSpPr/>
-          <p:nvPr/>
-        </p:nvSpPr>
-        <p:spPr>
-          <a:xfrm>
-            <a:off x="9562795" y="1819656"/>
-            <a:ext cx="1011326" cy="219456"/>
+          <p:cNvPr id="46" name="Text 44"/>
+          <p:cNvSpPr/>
+          <p:nvPr/>
+        </p:nvSpPr>
+        <p:spPr>
+          <a:xfrm>
+            <a:off x="8317611" y="1682496"/>
+            <a:ext cx="648081" cy="228600"/>
           </a:xfrm>
           <a:prstGeom prst="rect">
             <a:avLst/>
@@ -2290,30 +2543,30 @@
               <a:buNone/>
             </a:pPr>
             <a:r>
-              <a:rPr lang="en-US" sz="1100" b="1" dirty="0">
-                <a:solidFill>
-                  <a:srgbClr val="FFFFFF"/>
-                </a:solidFill>
-                <a:latin typeface="Calibri" pitchFamily="34" charset="0"/>
-                <a:ea typeface="Calibri" pitchFamily="34" charset="-122"/>
-                <a:cs typeface="Calibri" pitchFamily="34" charset="-120"/>
-              </a:rPr>
-              <a:t>Calibrate</a:t>
-            </a:r>
-            <a:endParaRPr lang="en-US" sz="1100" dirty="0"/>
-          </a:p>
-        </p:txBody>
-      </p:sp>
-      <p:sp>
-        <p:nvSpPr>
-          <p:cNvPr id="38" name="Text 36"/>
-          <p:cNvSpPr/>
-          <p:nvPr/>
-        </p:nvSpPr>
-        <p:spPr>
-          <a:xfrm>
-            <a:off x="9599371" y="2057400"/>
-            <a:ext cx="938174" cy="256032"/>
+              <a:rPr lang="en-US" sz="1200" b="1" dirty="0">
+                <a:solidFill>
+                  <a:srgbClr val="1F3A5F"/>
+                </a:solidFill>
+                <a:latin typeface="Calibri" pitchFamily="34" charset="0"/>
+                <a:ea typeface="Calibri" pitchFamily="34" charset="-122"/>
+                <a:cs typeface="Calibri" pitchFamily="34" charset="-120"/>
+              </a:rPr>
+              <a:t>4</a:t>
+            </a:r>
+            <a:endParaRPr lang="en-US" sz="1200" dirty="0"/>
+          </a:p>
+        </p:txBody>
+      </p:sp>
+      <p:sp>
+        <p:nvSpPr>
+          <p:cNvPr id="47" name="Text 45"/>
+          <p:cNvSpPr/>
+          <p:nvPr/>
+        </p:nvSpPr>
+        <p:spPr>
+          <a:xfrm>
+            <a:off x="8335899" y="1938528"/>
+            <a:ext cx="611505" cy="310896"/>
           </a:xfrm>
           <a:prstGeom prst="rect">
             <a:avLst/>
@@ -2329,15 +2582,15 @@
               <a:buNone/>
             </a:pPr>
             <a:r>
-              <a:rPr lang="en-US" sz="900" i="1" dirty="0">
-                <a:solidFill>
-                  <a:srgbClr val="FFFFFF"/>
-                </a:solidFill>
-                <a:latin typeface="Calibri" pitchFamily="34" charset="0"/>
-                <a:ea typeface="Calibri" pitchFamily="34" charset="-122"/>
-                <a:cs typeface="Calibri" pitchFamily="34" charset="-120"/>
-              </a:rPr>
-              <a:t>3-layer gate</a:t>
+              <a:rPr lang="en-US" sz="900" b="1" dirty="0">
+                <a:solidFill>
+                  <a:srgbClr val="1F3A5F"/>
+                </a:solidFill>
+                <a:latin typeface="Calibri" pitchFamily="34" charset="0"/>
+                <a:ea typeface="Calibri" pitchFamily="34" charset="-122"/>
+                <a:cs typeface="Calibri" pitchFamily="34" charset="-120"/>
+              </a:rPr>
+              <a:t>Fit PINN</a:t>
             </a:r>
             <a:endParaRPr lang="en-US" sz="900" dirty="0"/>
           </a:p>
@@ -2345,14 +2598,14 @@
       </p:sp>
       <p:sp>
         <p:nvSpPr>
-          <p:cNvPr id="39" name="Text 37"/>
-          <p:cNvSpPr/>
-          <p:nvPr/>
-        </p:nvSpPr>
-        <p:spPr>
-          <a:xfrm>
-            <a:off x="9599371" y="2331720"/>
-            <a:ext cx="938174" cy="384048"/>
+          <p:cNvPr id="48" name="Text 46"/>
+          <p:cNvSpPr/>
+          <p:nvPr/>
+        </p:nvSpPr>
+        <p:spPr>
+          <a:xfrm>
+            <a:off x="8335899" y="2249424"/>
+            <a:ext cx="611505" cy="329184"/>
           </a:xfrm>
           <a:prstGeom prst="rect">
             <a:avLst/>
@@ -2368,15 +2621,15 @@
               <a:buNone/>
             </a:pPr>
             <a:r>
-              <a:rPr lang="en-US" sz="800" dirty="0">
-                <a:solidFill>
-                  <a:srgbClr val="FFFFFF"/>
-                </a:solidFill>
-                <a:latin typeface="Calibri" pitchFamily="34" charset="0"/>
-                <a:ea typeface="Calibri" pitchFamily="34" charset="-122"/>
-                <a:cs typeface="Calibri" pitchFamily="34" charset="-120"/>
-              </a:rPr>
-              <a:t>Audit certificate</a:t>
+              <a:rPr lang="en-US" sz="800" i="1" dirty="0">
+                <a:solidFill>
+                  <a:srgbClr val="666666"/>
+                </a:solidFill>
+                <a:latin typeface="Calibri" pitchFamily="34" charset="0"/>
+                <a:ea typeface="Calibri" pitchFamily="34" charset="-122"/>
+                <a:cs typeface="Calibri" pitchFamily="34" charset="-120"/>
+              </a:rPr>
+              <a:t>FJ · HK · DCR</a:t>
             </a:r>
             <a:endParaRPr lang="en-US" sz="800" dirty="0"/>
           </a:p>
@@ -2384,59 +2637,20 @@
       </p:sp>
       <p:sp>
         <p:nvSpPr>
-          <p:cNvPr id="40" name="Text 38"/>
-          <p:cNvSpPr/>
-          <p:nvPr/>
-        </p:nvSpPr>
-        <p:spPr>
-          <a:xfrm>
-            <a:off x="10537546" y="2121408"/>
-            <a:ext cx="146304" cy="292608"/>
-          </a:xfrm>
-          <a:prstGeom prst="rect">
-            <a:avLst/>
-          </a:prstGeom>
-          <a:noFill/>
-          <a:ln/>
-        </p:spPr>
-        <p:txBody>
-          <a:bodyPr wrap="square" lIns="0" tIns="0" rIns="0" bIns="0" rtlCol="0" anchor="ctr"/>
-          <a:lstStyle/>
-          <a:p>
-            <a:pPr algn="ctr" indent="0" marL="0">
-              <a:buNone/>
-            </a:pPr>
-            <a:r>
-              <a:rPr lang="en-US" sz="1000" b="1" dirty="0">
-                <a:solidFill>
-                  <a:srgbClr val="1F3A5F"/>
-                </a:solidFill>
-                <a:latin typeface="Calibri" pitchFamily="34" charset="0"/>
-                <a:ea typeface="Calibri" pitchFamily="34" charset="-122"/>
-                <a:cs typeface="Calibri" pitchFamily="34" charset="-120"/>
-              </a:rPr>
-              <a:t>▶</a:t>
-            </a:r>
-            <a:endParaRPr lang="en-US" sz="1000" dirty="0"/>
-          </a:p>
-        </p:txBody>
-      </p:sp>
-      <p:sp>
-        <p:nvSpPr>
-          <p:cNvPr id="41" name="Shape 39"/>
-          <p:cNvSpPr/>
-          <p:nvPr/>
-        </p:nvSpPr>
-        <p:spPr>
-          <a:xfrm>
-            <a:off x="10647274" y="1764792"/>
-            <a:ext cx="1011326" cy="1005840"/>
-          </a:xfrm>
-          <a:prstGeom prst="rect">
-            <a:avLst/>
-          </a:prstGeom>
-          <a:solidFill>
-            <a:srgbClr val="F5F5F5"/>
+          <p:cNvPr id="49" name="Shape 47"/>
+          <p:cNvSpPr/>
+          <p:nvPr/>
+        </p:nvSpPr>
+        <p:spPr>
+          <a:xfrm>
+            <a:off x="9002268" y="1645920"/>
+            <a:ext cx="648081" cy="960120"/>
+          </a:xfrm>
+          <a:prstGeom prst="rect">
+            <a:avLst/>
+          </a:prstGeom>
+          <a:solidFill>
+            <a:srgbClr val="FAFAFA"/>
           </a:solidFill>
           <a:ln w="12700">
             <a:solidFill>
@@ -2448,14 +2662,14 @@
       </p:sp>
       <p:sp>
         <p:nvSpPr>
-          <p:cNvPr id="42" name="Text 40"/>
-          <p:cNvSpPr/>
-          <p:nvPr/>
-        </p:nvSpPr>
-        <p:spPr>
-          <a:xfrm>
-            <a:off x="10647274" y="1819656"/>
-            <a:ext cx="1011326" cy="219456"/>
+          <p:cNvPr id="50" name="Text 48"/>
+          <p:cNvSpPr/>
+          <p:nvPr/>
+        </p:nvSpPr>
+        <p:spPr>
+          <a:xfrm>
+            <a:off x="9002268" y="1682496"/>
+            <a:ext cx="648081" cy="228600"/>
           </a:xfrm>
           <a:prstGeom prst="rect">
             <a:avLst/>
@@ -2471,7 +2685,7 @@
               <a:buNone/>
             </a:pPr>
             <a:r>
-              <a:rPr lang="en-US" sz="1100" b="1" dirty="0">
+              <a:rPr lang="en-US" sz="1200" b="1" dirty="0">
                 <a:solidFill>
                   <a:srgbClr val="1F3A5F"/>
                 </a:solidFill>
@@ -2479,22 +2693,22 @@
                 <a:ea typeface="Calibri" pitchFamily="34" charset="-122"/>
                 <a:cs typeface="Calibri" pitchFamily="34" charset="-120"/>
               </a:rPr>
-              <a:t>Experiment</a:t>
-            </a:r>
-            <a:endParaRPr lang="en-US" sz="1100" dirty="0"/>
-          </a:p>
-        </p:txBody>
-      </p:sp>
-      <p:sp>
-        <p:nvSpPr>
-          <p:cNvPr id="43" name="Text 41"/>
-          <p:cNvSpPr/>
-          <p:nvPr/>
-        </p:nvSpPr>
-        <p:spPr>
-          <a:xfrm>
-            <a:off x="10683850" y="2057400"/>
-            <a:ext cx="938174" cy="256032"/>
+              <a:t>5</a:t>
+            </a:r>
+            <a:endParaRPr lang="en-US" sz="1200" dirty="0"/>
+          </a:p>
+        </p:txBody>
+      </p:sp>
+      <p:sp>
+        <p:nvSpPr>
+          <p:cNvPr id="51" name="Text 49"/>
+          <p:cNvSpPr/>
+          <p:nvPr/>
+        </p:nvSpPr>
+        <p:spPr>
+          <a:xfrm>
+            <a:off x="9020556" y="1938528"/>
+            <a:ext cx="611505" cy="310896"/>
           </a:xfrm>
           <a:prstGeom prst="rect">
             <a:avLst/>
@@ -2510,7 +2724,46 @@
               <a:buNone/>
             </a:pPr>
             <a:r>
-              <a:rPr lang="en-US" sz="900" i="1" dirty="0">
+              <a:rPr lang="en-US" sz="900" b="1" dirty="0">
+                <a:solidFill>
+                  <a:srgbClr val="1F3A5F"/>
+                </a:solidFill>
+                <a:latin typeface="Calibri" pitchFamily="34" charset="0"/>
+                <a:ea typeface="Calibri" pitchFamily="34" charset="-122"/>
+                <a:cs typeface="Calibri" pitchFamily="34" charset="-120"/>
+              </a:rPr>
+              <a:t>Build agents</a:t>
+            </a:r>
+            <a:endParaRPr lang="en-US" sz="900" dirty="0"/>
+          </a:p>
+        </p:txBody>
+      </p:sp>
+      <p:sp>
+        <p:nvSpPr>
+          <p:cNvPr id="52" name="Text 50"/>
+          <p:cNvSpPr/>
+          <p:nvPr/>
+        </p:nvSpPr>
+        <p:spPr>
+          <a:xfrm>
+            <a:off x="9020556" y="2249424"/>
+            <a:ext cx="611505" cy="329184"/>
+          </a:xfrm>
+          <a:prstGeom prst="rect">
+            <a:avLst/>
+          </a:prstGeom>
+          <a:noFill/>
+          <a:ln/>
+        </p:spPr>
+        <p:txBody>
+          <a:bodyPr wrap="square" lIns="0" tIns="0" rIns="0" bIns="0" rtlCol="0" anchor="ctr"/>
+          <a:lstStyle/>
+          <a:p>
+            <a:pPr algn="ctr" indent="0" marL="0">
+              <a:buNone/>
+            </a:pPr>
+            <a:r>
+              <a:rPr lang="en-US" sz="800" i="1" dirty="0">
                 <a:solidFill>
                   <a:srgbClr val="666666"/>
                 </a:solidFill>
@@ -2518,7 +2771,110 @@
                 <a:ea typeface="Calibri" pitchFamily="34" charset="-122"/>
                 <a:cs typeface="Calibri" pitchFamily="34" charset="-120"/>
               </a:rPr>
-              <a:t>Persuade ↔ Defend</a:t>
+              <a:t>500 personas</a:t>
+            </a:r>
+            <a:endParaRPr lang="en-US" sz="800" dirty="0"/>
+          </a:p>
+        </p:txBody>
+      </p:sp>
+      <p:sp>
+        <p:nvSpPr>
+          <p:cNvPr id="53" name="Shape 51"/>
+          <p:cNvSpPr/>
+          <p:nvPr/>
+        </p:nvSpPr>
+        <p:spPr>
+          <a:xfrm>
+            <a:off x="9686925" y="1645920"/>
+            <a:ext cx="648081" cy="960120"/>
+          </a:xfrm>
+          <a:prstGeom prst="rect">
+            <a:avLst/>
+          </a:prstGeom>
+          <a:solidFill>
+            <a:srgbClr val="1F3A5F"/>
+          </a:solidFill>
+          <a:ln w="12700">
+            <a:solidFill>
+              <a:srgbClr val="1F3A5F"/>
+            </a:solidFill>
+            <a:prstDash val="solid"/>
+          </a:ln>
+        </p:spPr>
+      </p:sp>
+      <p:sp>
+        <p:nvSpPr>
+          <p:cNvPr id="54" name="Text 52"/>
+          <p:cNvSpPr/>
+          <p:nvPr/>
+        </p:nvSpPr>
+        <p:spPr>
+          <a:xfrm>
+            <a:off x="9686925" y="1682496"/>
+            <a:ext cx="648081" cy="228600"/>
+          </a:xfrm>
+          <a:prstGeom prst="rect">
+            <a:avLst/>
+          </a:prstGeom>
+          <a:noFill/>
+          <a:ln/>
+        </p:spPr>
+        <p:txBody>
+          <a:bodyPr wrap="square" lIns="0" tIns="0" rIns="0" bIns="0" rtlCol="0" anchor="ctr"/>
+          <a:lstStyle/>
+          <a:p>
+            <a:pPr algn="ctr" indent="0" marL="0">
+              <a:buNone/>
+            </a:pPr>
+            <a:r>
+              <a:rPr lang="en-US" sz="1200" b="1" dirty="0">
+                <a:solidFill>
+                  <a:srgbClr val="FFFFFF"/>
+                </a:solidFill>
+                <a:latin typeface="Calibri" pitchFamily="34" charset="0"/>
+                <a:ea typeface="Calibri" pitchFamily="34" charset="-122"/>
+                <a:cs typeface="Calibri" pitchFamily="34" charset="-120"/>
+              </a:rPr>
+              <a:t>6</a:t>
+            </a:r>
+            <a:endParaRPr lang="en-US" sz="1200" dirty="0"/>
+          </a:p>
+        </p:txBody>
+      </p:sp>
+      <p:sp>
+        <p:nvSpPr>
+          <p:cNvPr id="55" name="Text 53"/>
+          <p:cNvSpPr/>
+          <p:nvPr/>
+        </p:nvSpPr>
+        <p:spPr>
+          <a:xfrm>
+            <a:off x="9705213" y="1938528"/>
+            <a:ext cx="611505" cy="310896"/>
+          </a:xfrm>
+          <a:prstGeom prst="rect">
+            <a:avLst/>
+          </a:prstGeom>
+          <a:noFill/>
+          <a:ln/>
+        </p:spPr>
+        <p:txBody>
+          <a:bodyPr wrap="square" lIns="0" tIns="0" rIns="0" bIns="0" rtlCol="0" anchor="ctr"/>
+          <a:lstStyle/>
+          <a:p>
+            <a:pPr algn="ctr" indent="0" marL="0">
+              <a:buNone/>
+            </a:pPr>
+            <a:r>
+              <a:rPr lang="en-US" sz="900" b="1" dirty="0">
+                <a:solidFill>
+                  <a:srgbClr val="FFFFFF"/>
+                </a:solidFill>
+                <a:latin typeface="Calibri" pitchFamily="34" charset="0"/>
+                <a:ea typeface="Calibri" pitchFamily="34" charset="-122"/>
+                <a:cs typeface="Calibri" pitchFamily="34" charset="-120"/>
+              </a:rPr>
+              <a:t>Calibrate</a:t>
             </a:r>
             <a:endParaRPr lang="en-US" sz="900" dirty="0"/>
           </a:p>
@@ -2526,14 +2882,14 @@
       </p:sp>
       <p:sp>
         <p:nvSpPr>
-          <p:cNvPr id="44" name="Text 42"/>
-          <p:cNvSpPr/>
-          <p:nvPr/>
-        </p:nvSpPr>
-        <p:spPr>
-          <a:xfrm>
-            <a:off x="10683850" y="2331720"/>
-            <a:ext cx="938174" cy="384048"/>
+          <p:cNvPr id="56" name="Text 54"/>
+          <p:cNvSpPr/>
+          <p:nvPr/>
+        </p:nvSpPr>
+        <p:spPr>
+          <a:xfrm>
+            <a:off x="9705213" y="2249424"/>
+            <a:ext cx="611505" cy="329184"/>
           </a:xfrm>
           <a:prstGeom prst="rect">
             <a:avLst/>
@@ -2549,7 +2905,344 @@
               <a:buNone/>
             </a:pPr>
             <a:r>
-              <a:rPr lang="en-US" sz="800" dirty="0">
+              <a:rPr lang="en-US" sz="800" i="1" dirty="0">
+                <a:solidFill>
+                  <a:srgbClr val="FFFFFF"/>
+                </a:solidFill>
+                <a:latin typeface="Calibri" pitchFamily="34" charset="0"/>
+                <a:ea typeface="Calibri" pitchFamily="34" charset="-122"/>
+                <a:cs typeface="Calibri" pitchFamily="34" charset="-120"/>
+              </a:rPr>
+              <a:t>3 layers</a:t>
+            </a:r>
+            <a:endParaRPr lang="en-US" sz="800" dirty="0"/>
+          </a:p>
+        </p:txBody>
+      </p:sp>
+      <p:sp>
+        <p:nvSpPr>
+          <p:cNvPr id="57" name="Shape 55"/>
+          <p:cNvSpPr/>
+          <p:nvPr/>
+        </p:nvSpPr>
+        <p:spPr>
+          <a:xfrm>
+            <a:off x="10371582" y="1645920"/>
+            <a:ext cx="648081" cy="960120"/>
+          </a:xfrm>
+          <a:prstGeom prst="rect">
+            <a:avLst/>
+          </a:prstGeom>
+          <a:solidFill>
+            <a:srgbClr val="FAFAFA"/>
+          </a:solidFill>
+          <a:ln w="12700">
+            <a:solidFill>
+              <a:srgbClr val="1F3A5F"/>
+            </a:solidFill>
+            <a:prstDash val="solid"/>
+          </a:ln>
+        </p:spPr>
+      </p:sp>
+      <p:sp>
+        <p:nvSpPr>
+          <p:cNvPr id="58" name="Text 56"/>
+          <p:cNvSpPr/>
+          <p:nvPr/>
+        </p:nvSpPr>
+        <p:spPr>
+          <a:xfrm>
+            <a:off x="10371582" y="1682496"/>
+            <a:ext cx="648081" cy="228600"/>
+          </a:xfrm>
+          <a:prstGeom prst="rect">
+            <a:avLst/>
+          </a:prstGeom>
+          <a:noFill/>
+          <a:ln/>
+        </p:spPr>
+        <p:txBody>
+          <a:bodyPr wrap="square" lIns="0" tIns="0" rIns="0" bIns="0" rtlCol="0" anchor="ctr"/>
+          <a:lstStyle/>
+          <a:p>
+            <a:pPr algn="ctr" indent="0" marL="0">
+              <a:buNone/>
+            </a:pPr>
+            <a:r>
+              <a:rPr lang="en-US" sz="1200" b="1" dirty="0">
+                <a:solidFill>
+                  <a:srgbClr val="1F3A5F"/>
+                </a:solidFill>
+                <a:latin typeface="Calibri" pitchFamily="34" charset="0"/>
+                <a:ea typeface="Calibri" pitchFamily="34" charset="-122"/>
+                <a:cs typeface="Calibri" pitchFamily="34" charset="-120"/>
+              </a:rPr>
+              <a:t>7</a:t>
+            </a:r>
+            <a:endParaRPr lang="en-US" sz="1200" dirty="0"/>
+          </a:p>
+        </p:txBody>
+      </p:sp>
+      <p:sp>
+        <p:nvSpPr>
+          <p:cNvPr id="59" name="Text 57"/>
+          <p:cNvSpPr/>
+          <p:nvPr/>
+        </p:nvSpPr>
+        <p:spPr>
+          <a:xfrm>
+            <a:off x="10389870" y="1938528"/>
+            <a:ext cx="611505" cy="310896"/>
+          </a:xfrm>
+          <a:prstGeom prst="rect">
+            <a:avLst/>
+          </a:prstGeom>
+          <a:noFill/>
+          <a:ln/>
+        </p:spPr>
+        <p:txBody>
+          <a:bodyPr wrap="square" lIns="0" tIns="0" rIns="0" bIns="0" rtlCol="0" anchor="ctr"/>
+          <a:lstStyle/>
+          <a:p>
+            <a:pPr algn="ctr" indent="0" marL="0">
+              <a:buNone/>
+            </a:pPr>
+            <a:r>
+              <a:rPr lang="en-US" sz="900" b="1" dirty="0">
+                <a:solidFill>
+                  <a:srgbClr val="1F3A5F"/>
+                </a:solidFill>
+                <a:latin typeface="Calibri" pitchFamily="34" charset="0"/>
+                <a:ea typeface="Calibri" pitchFamily="34" charset="-122"/>
+                <a:cs typeface="Calibri" pitchFamily="34" charset="-120"/>
+              </a:rPr>
+              <a:t>Persuasion</a:t>
+            </a:r>
+            <a:endParaRPr lang="en-US" sz="900" dirty="0"/>
+          </a:p>
+        </p:txBody>
+      </p:sp>
+      <p:sp>
+        <p:nvSpPr>
+          <p:cNvPr id="60" name="Text 58"/>
+          <p:cNvSpPr/>
+          <p:nvPr/>
+        </p:nvSpPr>
+        <p:spPr>
+          <a:xfrm>
+            <a:off x="10389870" y="2249424"/>
+            <a:ext cx="611505" cy="329184"/>
+          </a:xfrm>
+          <a:prstGeom prst="rect">
+            <a:avLst/>
+          </a:prstGeom>
+          <a:noFill/>
+          <a:ln/>
+        </p:spPr>
+        <p:txBody>
+          <a:bodyPr wrap="square" lIns="0" tIns="0" rIns="0" bIns="0" rtlCol="0" anchor="ctr"/>
+          <a:lstStyle/>
+          <a:p>
+            <a:pPr algn="ctr" indent="0" marL="0">
+              <a:buNone/>
+            </a:pPr>
+            <a:r>
+              <a:rPr lang="en-US" sz="800" i="1" dirty="0">
+                <a:solidFill>
+                  <a:srgbClr val="666666"/>
+                </a:solidFill>
+                <a:latin typeface="Calibri" pitchFamily="34" charset="0"/>
+                <a:ea typeface="Calibri" pitchFamily="34" charset="-122"/>
+                <a:cs typeface="Calibri" pitchFamily="34" charset="-120"/>
+              </a:rPr>
+              <a:t>160 cells</a:t>
+            </a:r>
+            <a:endParaRPr lang="en-US" sz="800" dirty="0"/>
+          </a:p>
+        </p:txBody>
+      </p:sp>
+      <p:sp>
+        <p:nvSpPr>
+          <p:cNvPr id="61" name="Shape 59"/>
+          <p:cNvSpPr/>
+          <p:nvPr/>
+        </p:nvSpPr>
+        <p:spPr>
+          <a:xfrm>
+            <a:off x="11056239" y="1645920"/>
+            <a:ext cx="648081" cy="960120"/>
+          </a:xfrm>
+          <a:prstGeom prst="rect">
+            <a:avLst/>
+          </a:prstGeom>
+          <a:solidFill>
+            <a:srgbClr val="FAFAFA"/>
+          </a:solidFill>
+          <a:ln w="12700">
+            <a:solidFill>
+              <a:srgbClr val="1F3A5F"/>
+            </a:solidFill>
+            <a:prstDash val="solid"/>
+          </a:ln>
+        </p:spPr>
+      </p:sp>
+      <p:sp>
+        <p:nvSpPr>
+          <p:cNvPr id="62" name="Text 60"/>
+          <p:cNvSpPr/>
+          <p:nvPr/>
+        </p:nvSpPr>
+        <p:spPr>
+          <a:xfrm>
+            <a:off x="11056239" y="1682496"/>
+            <a:ext cx="648081" cy="228600"/>
+          </a:xfrm>
+          <a:prstGeom prst="rect">
+            <a:avLst/>
+          </a:prstGeom>
+          <a:noFill/>
+          <a:ln/>
+        </p:spPr>
+        <p:txBody>
+          <a:bodyPr wrap="square" lIns="0" tIns="0" rIns="0" bIns="0" rtlCol="0" anchor="ctr"/>
+          <a:lstStyle/>
+          <a:p>
+            <a:pPr algn="ctr" indent="0" marL="0">
+              <a:buNone/>
+            </a:pPr>
+            <a:r>
+              <a:rPr lang="en-US" sz="1200" b="1" dirty="0">
+                <a:solidFill>
+                  <a:srgbClr val="1F3A5F"/>
+                </a:solidFill>
+                <a:latin typeface="Calibri" pitchFamily="34" charset="0"/>
+                <a:ea typeface="Calibri" pitchFamily="34" charset="-122"/>
+                <a:cs typeface="Calibri" pitchFamily="34" charset="-120"/>
+              </a:rPr>
+              <a:t>8</a:t>
+            </a:r>
+            <a:endParaRPr lang="en-US" sz="1200" dirty="0"/>
+          </a:p>
+        </p:txBody>
+      </p:sp>
+      <p:sp>
+        <p:nvSpPr>
+          <p:cNvPr id="63" name="Text 61"/>
+          <p:cNvSpPr/>
+          <p:nvPr/>
+        </p:nvSpPr>
+        <p:spPr>
+          <a:xfrm>
+            <a:off x="11074527" y="1938528"/>
+            <a:ext cx="611505" cy="310896"/>
+          </a:xfrm>
+          <a:prstGeom prst="rect">
+            <a:avLst/>
+          </a:prstGeom>
+          <a:noFill/>
+          <a:ln/>
+        </p:spPr>
+        <p:txBody>
+          <a:bodyPr wrap="square" lIns="0" tIns="0" rIns="0" bIns="0" rtlCol="0" anchor="ctr"/>
+          <a:lstStyle/>
+          <a:p>
+            <a:pPr algn="ctr" indent="0" marL="0">
+              <a:buNone/>
+            </a:pPr>
+            <a:r>
+              <a:rPr lang="en-US" sz="900" b="1" dirty="0">
+                <a:solidFill>
+                  <a:srgbClr val="1F3A5F"/>
+                </a:solidFill>
+                <a:latin typeface="Calibri" pitchFamily="34" charset="0"/>
+                <a:ea typeface="Calibri" pitchFamily="34" charset="-122"/>
+                <a:cs typeface="Calibri" pitchFamily="34" charset="-120"/>
+              </a:rPr>
+              <a:t>Defense</a:t>
+            </a:r>
+            <a:endParaRPr lang="en-US" sz="900" dirty="0"/>
+          </a:p>
+        </p:txBody>
+      </p:sp>
+      <p:sp>
+        <p:nvSpPr>
+          <p:cNvPr id="64" name="Text 62"/>
+          <p:cNvSpPr/>
+          <p:nvPr/>
+        </p:nvSpPr>
+        <p:spPr>
+          <a:xfrm>
+            <a:off x="11074527" y="2249424"/>
+            <a:ext cx="611505" cy="329184"/>
+          </a:xfrm>
+          <a:prstGeom prst="rect">
+            <a:avLst/>
+          </a:prstGeom>
+          <a:noFill/>
+          <a:ln/>
+        </p:spPr>
+        <p:txBody>
+          <a:bodyPr wrap="square" lIns="0" tIns="0" rIns="0" bIns="0" rtlCol="0" anchor="ctr"/>
+          <a:lstStyle/>
+          <a:p>
+            <a:pPr algn="ctr" indent="0" marL="0">
+              <a:buNone/>
+            </a:pPr>
+            <a:r>
+              <a:rPr lang="en-US" sz="800" i="1" dirty="0">
+                <a:solidFill>
+                  <a:srgbClr val="666666"/>
+                </a:solidFill>
+                <a:latin typeface="Calibri" pitchFamily="34" charset="0"/>
+                <a:ea typeface="Calibri" pitchFamily="34" charset="-122"/>
+                <a:cs typeface="Calibri" pitchFamily="34" charset="-120"/>
+              </a:rPr>
+              <a:t>3 inocs.</a:t>
+            </a:r>
+            <a:endParaRPr lang="en-US" sz="800" dirty="0"/>
+          </a:p>
+        </p:txBody>
+      </p:sp>
+      <p:sp>
+        <p:nvSpPr>
+          <p:cNvPr id="65" name="Text 63"/>
+          <p:cNvSpPr/>
+          <p:nvPr/>
+        </p:nvSpPr>
+        <p:spPr>
+          <a:xfrm>
+            <a:off x="6263640" y="2660904"/>
+            <a:ext cx="5440680" cy="274320"/>
+          </a:xfrm>
+          <a:prstGeom prst="rect">
+            <a:avLst/>
+          </a:prstGeom>
+          <a:noFill/>
+          <a:ln/>
+        </p:spPr>
+        <p:txBody>
+          <a:bodyPr wrap="square" lIns="0" tIns="0" rIns="0" bIns="0" rtlCol="0" anchor="t"/>
+          <a:lstStyle/>
+          <a:p>
+            <a:pPr algn="l" indent="0" marL="0">
+              <a:buNone/>
+            </a:pPr>
+            <a:r>
+              <a:rPr lang="en-US" sz="850" b="1" i="1" dirty="0">
+                <a:solidFill>
+                  <a:srgbClr val="666666"/>
+                </a:solidFill>
+                <a:latin typeface="Calibri" pitchFamily="34" charset="0"/>
+                <a:ea typeface="Calibri" pitchFamily="34" charset="-122"/>
+                <a:cs typeface="Calibri" pitchFamily="34" charset="-120"/>
+              </a:rPr>
+              <a:t>Outputs:  </a:t>
+            </a:r>
+            <a:pPr algn="l" indent="0" marL="0">
+              <a:buNone/>
+            </a:pPr>
+            <a:r>
+              <a:rPr lang="en-US" sz="850" i="1" dirty="0">
                 <a:solidFill>
                   <a:srgbClr val="303030"/>
                 </a:solidFill>
@@ -2557,22 +3250,22 @@
                 <a:ea typeface="Calibri" pitchFamily="34" charset="-122"/>
                 <a:cs typeface="Calibri" pitchFamily="34" charset="-120"/>
               </a:rPr>
-              <a:t>Effect &amp; inoc.</a:t>
-            </a:r>
-            <a:endParaRPr lang="en-US" sz="800" dirty="0"/>
-          </a:p>
-        </p:txBody>
-      </p:sp>
-      <p:sp>
-        <p:nvSpPr>
-          <p:cNvPr id="45" name="Shape 43"/>
-          <p:cNvSpPr/>
-          <p:nvPr/>
-        </p:nvSpPr>
-        <p:spPr>
-          <a:xfrm>
-            <a:off x="6309360" y="2953512"/>
-            <a:ext cx="2628900" cy="557784"/>
+              <a:t>Step 4 → coefficient fingerprint  ·  Step 6 → audit certificate (CMV Δ ≥ 70%)  ·  Step 7 → lever-effect matrix  ·  Step 8 → defense effectiveness curves</a:t>
+            </a:r>
+            <a:endParaRPr lang="en-US" sz="850" dirty="0"/>
+          </a:p>
+        </p:txBody>
+      </p:sp>
+      <p:sp>
+        <p:nvSpPr>
+          <p:cNvPr id="66" name="Shape 64"/>
+          <p:cNvSpPr/>
+          <p:nvPr/>
+        </p:nvSpPr>
+        <p:spPr>
+          <a:xfrm>
+            <a:off x="6263640" y="2990088"/>
+            <a:ext cx="2674620" cy="548640"/>
           </a:xfrm>
           <a:prstGeom prst="rect">
             <a:avLst/>
@@ -2590,14 +3283,14 @@
       </p:sp>
       <p:sp>
         <p:nvSpPr>
-          <p:cNvPr id="46" name="Text 44"/>
-          <p:cNvSpPr/>
-          <p:nvPr/>
-        </p:nvSpPr>
-        <p:spPr>
-          <a:xfrm>
-            <a:off x="6400800" y="3008376"/>
-            <a:ext cx="2446020" cy="448056"/>
+          <p:cNvPr id="67" name="Text 65"/>
+          <p:cNvSpPr/>
+          <p:nvPr/>
+        </p:nvSpPr>
+        <p:spPr>
+          <a:xfrm>
+            <a:off x="6336792" y="3044952"/>
+            <a:ext cx="2528316" cy="438912"/>
           </a:xfrm>
           <a:prstGeom prst="rect">
             <a:avLst/>
@@ -2636,7 +3329,7 @@
               <a:buNone/>
             </a:pPr>
             <a:r>
-              <a:rPr lang="en-US" sz="950" dirty="0">
+              <a:rPr lang="en-US" sz="900" dirty="0">
                 <a:solidFill>
                   <a:srgbClr val="303030"/>
                 </a:solidFill>
@@ -2652,14 +3345,14 @@
       </p:sp>
       <p:sp>
         <p:nvSpPr>
-          <p:cNvPr id="47" name="Shape 45"/>
-          <p:cNvSpPr/>
-          <p:nvPr/>
-        </p:nvSpPr>
-        <p:spPr>
-          <a:xfrm>
-            <a:off x="9029700" y="2953512"/>
-            <a:ext cx="2628900" cy="557784"/>
+          <p:cNvPr id="68" name="Shape 66"/>
+          <p:cNvSpPr/>
+          <p:nvPr/>
+        </p:nvSpPr>
+        <p:spPr>
+          <a:xfrm>
+            <a:off x="9029700" y="2990088"/>
+            <a:ext cx="2674620" cy="548640"/>
           </a:xfrm>
           <a:prstGeom prst="rect">
             <a:avLst/>
@@ -2677,14 +3370,14 @@
       </p:sp>
       <p:sp>
         <p:nvSpPr>
-          <p:cNvPr id="48" name="Text 46"/>
-          <p:cNvSpPr/>
-          <p:nvPr/>
-        </p:nvSpPr>
-        <p:spPr>
-          <a:xfrm>
-            <a:off x="9121140" y="3008376"/>
-            <a:ext cx="2446020" cy="448056"/>
+          <p:cNvPr id="69" name="Text 67"/>
+          <p:cNvSpPr/>
+          <p:nvPr/>
+        </p:nvSpPr>
+        <p:spPr>
+          <a:xfrm>
+            <a:off x="9102852" y="3044952"/>
+            <a:ext cx="2528316" cy="438912"/>
           </a:xfrm>
           <a:prstGeom prst="rect">
             <a:avLst/>
@@ -2723,7 +3416,7 @@
               <a:buNone/>
             </a:pPr>
             <a:r>
-              <a:rPr lang="en-US" sz="950" dirty="0">
+              <a:rPr lang="en-US" sz="900" dirty="0">
                 <a:solidFill>
                   <a:srgbClr val="303030"/>
                 </a:solidFill>
@@ -2739,7 +3432,7 @@
       </p:sp>
       <p:sp>
         <p:nvSpPr>
-          <p:cNvPr id="49" name="Text 47"/>
+          <p:cNvPr id="70" name="Text 68"/>
           <p:cNvSpPr/>
           <p:nvPr/>
         </p:nvSpPr>
@@ -2770,7 +3463,7 @@
                 <a:ea typeface="Calibri" pitchFamily="34" charset="-122"/>
                 <a:cs typeface="Calibri" pitchFamily="34" charset="-120"/>
               </a:rPr>
-              <a:t>FY27 Objectives</a:t>
+              <a:t>FY27 Objectives &amp; Example Results</a:t>
             </a:r>
             <a:endParaRPr lang="en-US" sz="1400" dirty="0"/>
           </a:p>
@@ -2778,14 +3471,53 @@
       </p:sp>
       <p:sp>
         <p:nvSpPr>
-          <p:cNvPr id="50" name="Text 48"/>
+          <p:cNvPr id="71" name="Text 69"/>
           <p:cNvSpPr/>
           <p:nvPr/>
         </p:nvSpPr>
         <p:spPr>
           <a:xfrm>
             <a:off x="457200" y="4014216"/>
-            <a:ext cx="5532120" cy="329184"/>
+            <a:ext cx="5532120" cy="201168"/>
+          </a:xfrm>
+          <a:prstGeom prst="rect">
+            <a:avLst/>
+          </a:prstGeom>
+          <a:noFill/>
+          <a:ln/>
+        </p:spPr>
+        <p:txBody>
+          <a:bodyPr wrap="square" lIns="0" tIns="0" rIns="0" bIns="0" rtlCol="0" anchor="ctr"/>
+          <a:lstStyle/>
+          <a:p>
+            <a:pPr indent="0" marL="0">
+              <a:buNone/>
+            </a:pPr>
+            <a:r>
+              <a:rPr lang="en-US" sz="1050" b="1" i="1" dirty="0">
+                <a:solidFill>
+                  <a:srgbClr val="1F3A5F"/>
+                </a:solidFill>
+                <a:latin typeface="Calibri" pitchFamily="34" charset="0"/>
+                <a:ea typeface="Calibri" pitchFamily="34" charset="-122"/>
+                <a:cs typeface="Calibri" pitchFamily="34" charset="-120"/>
+              </a:rPr>
+              <a:t>Calibration must pass three layers (Step 6)</a:t>
+            </a:r>
+            <a:endParaRPr lang="en-US" sz="1050" dirty="0"/>
+          </a:p>
+        </p:txBody>
+      </p:sp>
+      <p:sp>
+        <p:nvSpPr>
+          <p:cNvPr id="72" name="Text 70"/>
+          <p:cNvSpPr/>
+          <p:nvPr/>
+        </p:nvSpPr>
+        <p:spPr>
+          <a:xfrm>
+            <a:off x="457200" y="4197096"/>
+            <a:ext cx="5532120" cy="274320"/>
           </a:xfrm>
           <a:prstGeom prst="rect">
             <a:avLst/>
@@ -2797,15 +3529,11 @@
           <a:bodyPr wrap="square" lIns="0" tIns="0" rIns="0" bIns="0" rtlCol="0" anchor="t"/>
           <a:lstStyle/>
           <a:p>
-            <a:pPr marL="342900" indent="-342900">
-              <a:spcAft>
-                <a:spcPts val="100"/>
-              </a:spcAft>
-              <a:buSzPct val="100000"/>
-              <a:buChar char="•"/>
-            </a:pPr>
-            <a:r>
-              <a:rPr lang="en-US" sz="950" b="1" dirty="0">
+            <a:pPr indent="0" marL="0">
+              <a:buNone/>
+            </a:pPr>
+            <a:r>
+              <a:rPr lang="en-US" sz="900" b="1" dirty="0">
                 <a:solidFill>
                   <a:srgbClr val="1F3A5F"/>
                 </a:solidFill>
@@ -2813,16 +3541,13 @@
                 <a:ea typeface="Calibri" pitchFamily="34" charset="-122"/>
                 <a:cs typeface="Calibri" pitchFamily="34" charset="-120"/>
               </a:rPr>
-              <a:t>Q1–Q2  </a:t>
+              <a:t>L1 </a:t>
             </a:r>
             <a:pPr indent="0" marL="0">
-              <a:spcAft>
-                <a:spcPts val="100"/>
-              </a:spcAft>
-              <a:buNone/>
-            </a:pPr>
-            <a:r>
-              <a:rPr lang="en-US" sz="950" dirty="0">
+              <a:buNone/>
+            </a:pPr>
+            <a:r>
+              <a:rPr lang="en-US" sz="900" dirty="0">
                 <a:solidFill>
                   <a:srgbClr val="303030"/>
                 </a:solidFill>
@@ -2830,16 +3555,222 @@
                 <a:ea typeface="Calibri" pitchFamily="34" charset="-122"/>
                 <a:cs typeface="Calibri" pitchFamily="34" charset="-120"/>
               </a:rPr>
-              <a:t>PINN coefficients on r/Brexit surrogate; bootstrap CIs across 3 priors. </a:t>
-            </a:r>
+              <a:t>Coefficient match — sim ⟨α⟩, ⟨ε⟩, D, v, R within real-data 95% CIs (real ⟨α⟩=0.42±0.04 → sim 0.39 ✓)</a:t>
+            </a:r>
+            <a:endParaRPr lang="en-US" sz="900" dirty="0"/>
+          </a:p>
+        </p:txBody>
+      </p:sp>
+      <p:sp>
+        <p:nvSpPr>
+          <p:cNvPr id="73" name="Text 71"/>
+          <p:cNvSpPr/>
+          <p:nvPr/>
+        </p:nvSpPr>
+        <p:spPr>
+          <a:xfrm>
+            <a:off x="457200" y="4471416"/>
+            <a:ext cx="5532120" cy="274320"/>
+          </a:xfrm>
+          <a:prstGeom prst="rect">
+            <a:avLst/>
+          </a:prstGeom>
+          <a:noFill/>
+          <a:ln/>
+        </p:spPr>
+        <p:txBody>
+          <a:bodyPr wrap="square" lIns="0" tIns="0" rIns="0" bIns="0" rtlCol="0" anchor="t"/>
+          <a:lstStyle/>
+          <a:p>
             <a:pPr indent="0" marL="0">
-              <a:spcAft>
-                <a:spcPts val="100"/>
-              </a:spcAft>
-              <a:buNone/>
-            </a:pPr>
-            <a:r>
-              <a:rPr lang="en-US" sz="950" dirty="0">
+              <a:buNone/>
+            </a:pPr>
+            <a:r>
+              <a:rPr lang="en-US" sz="900" b="1" dirty="0">
+                <a:solidFill>
+                  <a:srgbClr val="1F3A5F"/>
+                </a:solidFill>
+                <a:latin typeface="Calibri" pitchFamily="34" charset="0"/>
+                <a:ea typeface="Calibri" pitchFamily="34" charset="-122"/>
+                <a:cs typeface="Calibri" pitchFamily="34" charset="-120"/>
+              </a:rPr>
+              <a:t>L2 </a:t>
+            </a:r>
+            <a:pPr indent="0" marL="0">
+              <a:buNone/>
+            </a:pPr>
+            <a:r>
+              <a:rPr lang="en-US" sz="900" dirty="0">
+                <a:solidFill>
+                  <a:srgbClr val="303030"/>
+                </a:solidFill>
+                <a:latin typeface="Calibri" pitchFamily="34" charset="0"/>
+                <a:ea typeface="Calibri" pitchFamily="34" charset="-122"/>
+                <a:cs typeface="Calibri" pitchFamily="34" charset="-120"/>
+              </a:rPr>
+              <a:t>5 behavioral gates — cascade timing, drop-out, sentiment trajectories, cross-topic, opinion-leader rank ρ ≥ 0.5</a:t>
+            </a:r>
+            <a:endParaRPr lang="en-US" sz="900" dirty="0"/>
+          </a:p>
+        </p:txBody>
+      </p:sp>
+      <p:sp>
+        <p:nvSpPr>
+          <p:cNvPr id="74" name="Text 72"/>
+          <p:cNvSpPr/>
+          <p:nvPr/>
+        </p:nvSpPr>
+        <p:spPr>
+          <a:xfrm>
+            <a:off x="457200" y="4745736"/>
+            <a:ext cx="5532120" cy="201168"/>
+          </a:xfrm>
+          <a:prstGeom prst="rect">
+            <a:avLst/>
+          </a:prstGeom>
+          <a:noFill/>
+          <a:ln/>
+        </p:spPr>
+        <p:txBody>
+          <a:bodyPr wrap="square" lIns="0" tIns="0" rIns="0" bIns="0" rtlCol="0" anchor="t"/>
+          <a:lstStyle/>
+          <a:p>
+            <a:pPr indent="0" marL="0">
+              <a:buNone/>
+            </a:pPr>
+            <a:r>
+              <a:rPr lang="en-US" sz="900" b="1" dirty="0">
+                <a:solidFill>
+                  <a:srgbClr val="1F3A5F"/>
+                </a:solidFill>
+                <a:latin typeface="Calibri" pitchFamily="34" charset="0"/>
+                <a:ea typeface="Calibri" pitchFamily="34" charset="-122"/>
+                <a:cs typeface="Calibri" pitchFamily="34" charset="-120"/>
+              </a:rPr>
+              <a:t>L3 </a:t>
+            </a:r>
+            <a:pPr indent="0" marL="0">
+              <a:buNone/>
+            </a:pPr>
+            <a:r>
+              <a:rPr lang="en-US" sz="900" dirty="0">
+                <a:solidFill>
+                  <a:srgbClr val="303030"/>
+                </a:solidFill>
+                <a:latin typeface="Calibri" pitchFamily="34" charset="0"/>
+                <a:ea typeface="Calibri" pitchFamily="34" charset="-122"/>
+                <a:cs typeface="Calibri" pitchFamily="34" charset="-120"/>
+              </a:rPr>
+              <a:t>ChangeMyView Δ ground truth — sim CMV-OP agents agree with human deltas at </a:t>
+            </a:r>
+            <a:pPr indent="0" marL="0">
+              <a:buNone/>
+            </a:pPr>
+            <a:r>
+              <a:rPr lang="en-US" sz="900" b="1" dirty="0">
+                <a:solidFill>
+                  <a:srgbClr val="2E7D5B"/>
+                </a:solidFill>
+                <a:latin typeface="Calibri" pitchFamily="34" charset="0"/>
+                <a:ea typeface="Calibri" pitchFamily="34" charset="-122"/>
+                <a:cs typeface="Calibri" pitchFamily="34" charset="-120"/>
+              </a:rPr>
+              <a:t>≥ 70%</a:t>
+            </a:r>
+            <a:endParaRPr lang="en-US" sz="900" dirty="0"/>
+          </a:p>
+        </p:txBody>
+      </p:sp>
+      <p:sp>
+        <p:nvSpPr>
+          <p:cNvPr id="75" name="Text 73"/>
+          <p:cNvSpPr/>
+          <p:nvPr/>
+        </p:nvSpPr>
+        <p:spPr>
+          <a:xfrm>
+            <a:off x="457200" y="5020056"/>
+            <a:ext cx="5532120" cy="201168"/>
+          </a:xfrm>
+          <a:prstGeom prst="rect">
+            <a:avLst/>
+          </a:prstGeom>
+          <a:noFill/>
+          <a:ln/>
+        </p:spPr>
+        <p:txBody>
+          <a:bodyPr wrap="square" lIns="0" tIns="0" rIns="0" bIns="0" rtlCol="0" anchor="ctr"/>
+          <a:lstStyle/>
+          <a:p>
+            <a:pPr indent="0" marL="0">
+              <a:buNone/>
+            </a:pPr>
+            <a:r>
+              <a:rPr lang="en-US" sz="1050" b="1" i="1" dirty="0">
+                <a:solidFill>
+                  <a:srgbClr val="1F3A5F"/>
+                </a:solidFill>
+                <a:latin typeface="Calibri" pitchFamily="34" charset="0"/>
+                <a:ea typeface="Calibri" pitchFamily="34" charset="-122"/>
+                <a:cs typeface="Calibri" pitchFamily="34" charset="-120"/>
+              </a:rPr>
+              <a:t>Example experimental result (Step 7, Cell #073)</a:t>
+            </a:r>
+            <a:endParaRPr lang="en-US" sz="1050" dirty="0"/>
+          </a:p>
+        </p:txBody>
+      </p:sp>
+      <p:sp>
+        <p:nvSpPr>
+          <p:cNvPr id="76" name="Shape 74"/>
+          <p:cNvSpPr/>
+          <p:nvPr/>
+        </p:nvSpPr>
+        <p:spPr>
+          <a:xfrm>
+            <a:off x="457200" y="5202936"/>
+            <a:ext cx="5440680" cy="731520"/>
+          </a:xfrm>
+          <a:prstGeom prst="rect">
+            <a:avLst/>
+          </a:prstGeom>
+          <a:solidFill>
+            <a:srgbClr val="F5F5F5"/>
+          </a:solidFill>
+          <a:ln w="6350">
+            <a:solidFill>
+              <a:srgbClr val="1F3A5F"/>
+            </a:solidFill>
+            <a:prstDash val="solid"/>
+          </a:ln>
+        </p:spPr>
+      </p:sp>
+      <p:sp>
+        <p:nvSpPr>
+          <p:cNvPr id="77" name="Text 75"/>
+          <p:cNvSpPr/>
+          <p:nvPr/>
+        </p:nvSpPr>
+        <p:spPr>
+          <a:xfrm>
+            <a:off x="548640" y="5257800"/>
+            <a:ext cx="5257800" cy="640080"/>
+          </a:xfrm>
+          <a:prstGeom prst="rect">
+            <a:avLst/>
+          </a:prstGeom>
+          <a:noFill/>
+          <a:ln/>
+        </p:spPr>
+        <p:txBody>
+          <a:bodyPr wrap="square" lIns="0" tIns="0" rIns="0" bIns="0" rtlCol="0" anchor="t"/>
+          <a:lstStyle/>
+          <a:p>
+            <a:pPr indent="0" marL="0">
+              <a:buNone/>
+            </a:pPr>
+            <a:r>
+              <a:rPr lang="en-US" sz="900" i="1" dirty="0">
                 <a:solidFill>
                   <a:srgbClr val="666666"/>
                 </a:solidFill>
@@ -2847,16 +3778,58 @@
                 <a:ea typeface="Calibri" pitchFamily="34" charset="-122"/>
                 <a:cs typeface="Calibri" pitchFamily="34" charset="-120"/>
               </a:rPr>
-              <a:t>M:</a:t>
-            </a:r>
+              <a:t>info-dense + RM-trained + bridge position  →  </a:t>
+            </a:r>
+            <a:endParaRPr lang="en-US" sz="900" dirty="0"/>
+          </a:p>
+          <a:p>
             <a:pPr indent="0" marL="0">
-              <a:spcAft>
-                <a:spcPts val="100"/>
-              </a:spcAft>
-              <a:buNone/>
-            </a:pPr>
-            <a:r>
-              <a:rPr lang="en-US" sz="950" dirty="0">
+              <a:buNone/>
+            </a:pPr>
+            <a:r>
+              <a:rPr lang="en-US" sz="1000" b="1" dirty="0">
+                <a:solidFill>
+                  <a:srgbClr val="2E7D5B"/>
+                </a:solidFill>
+                <a:latin typeface="Calibri" pitchFamily="34" charset="0"/>
+                <a:ea typeface="Calibri" pitchFamily="34" charset="-122"/>
+                <a:cs typeface="Calibri" pitchFamily="34" charset="-120"/>
+              </a:rPr>
+              <a:t>ΔAttitude +0.18</a:t>
+            </a:r>
+            <a:pPr indent="0" marL="0">
+              <a:buNone/>
+            </a:pPr>
+            <a:r>
+              <a:rPr lang="en-US" sz="1000" dirty="0">
+                <a:solidFill>
+                  <a:srgbClr val="666666"/>
+                </a:solidFill>
+                <a:latin typeface="Calibri" pitchFamily="34" charset="0"/>
+                <a:ea typeface="Calibri" pitchFamily="34" charset="-122"/>
+                <a:cs typeface="Calibri" pitchFamily="34" charset="-120"/>
+              </a:rPr>
+              <a:t>  ·  </a:t>
+            </a:r>
+            <a:pPr indent="0" marL="0">
+              <a:buNone/>
+            </a:pPr>
+            <a:r>
+              <a:rPr lang="en-US" sz="1000" b="1" dirty="0">
+                <a:solidFill>
+                  <a:srgbClr val="2E7D5B"/>
+                </a:solidFill>
+                <a:latin typeface="Calibri" pitchFamily="34" charset="0"/>
+                <a:ea typeface="Calibri" pitchFamily="34" charset="-122"/>
+                <a:cs typeface="Calibri" pitchFamily="34" charset="-120"/>
+              </a:rPr>
+              <a:t>Δ-rate 14%</a:t>
+            </a:r>
+            <a:pPr indent="0" marL="0">
+              <a:buNone/>
+            </a:pPr>
+            <a:r>
+              <a:rPr lang="en-US" sz="900" dirty="0">
                 <a:solidFill>
                   <a:srgbClr val="303030"/>
                 </a:solidFill>
@@ -2864,22 +3837,67 @@
                 <a:ea typeface="Calibri" pitchFamily="34" charset="-122"/>
                 <a:cs typeface="Calibri" pitchFamily="34" charset="-120"/>
               </a:rPr>
-              <a:t> stable fingerprint + audit memo.</a:t>
-            </a:r>
-            <a:endParaRPr lang="en-US" sz="950" dirty="0"/>
-          </a:p>
-        </p:txBody>
-      </p:sp>
-      <p:sp>
-        <p:nvSpPr>
-          <p:cNvPr id="51" name="Text 49"/>
-          <p:cNvSpPr/>
-          <p:nvPr/>
-        </p:nvSpPr>
-        <p:spPr>
-          <a:xfrm>
-            <a:off x="457200" y="4343400"/>
-            <a:ext cx="5532120" cy="329184"/>
+              <a:t>  ·  cascade reach 38%  ·  factual accuracy </a:t>
+            </a:r>
+            <a:pPr indent="0" marL="0">
+              <a:buNone/>
+            </a:pPr>
+            <a:r>
+              <a:rPr lang="en-US" sz="1000" b="1" dirty="0">
+                <a:solidFill>
+                  <a:srgbClr val="B85D2E"/>
+                </a:solidFill>
+                <a:latin typeface="Calibri" pitchFamily="34" charset="0"/>
+                <a:ea typeface="Calibri" pitchFamily="34" charset="-122"/>
+                <a:cs typeface="Calibri" pitchFamily="34" charset="-120"/>
+              </a:rPr>
+              <a:t>81%</a:t>
+            </a:r>
+            <a:endParaRPr lang="en-US" sz="900" dirty="0"/>
+          </a:p>
+          <a:p>
+            <a:pPr indent="0" marL="0">
+              <a:buNone/>
+            </a:pPr>
+            <a:r>
+              <a:rPr lang="en-US" sz="900" dirty="0">
+                <a:solidFill>
+                  <a:srgbClr val="303030"/>
+                </a:solidFill>
+                <a:latin typeface="Calibri" pitchFamily="34" charset="0"/>
+                <a:ea typeface="Calibri" pitchFamily="34" charset="-122"/>
+                <a:cs typeface="Calibri" pitchFamily="34" charset="-120"/>
+              </a:rPr>
+              <a:t>9× more persuasive than baseline cell — but 4× the rate of false claims. </a:t>
+            </a:r>
+            <a:pPr indent="0" marL="0">
+              <a:buNone/>
+            </a:pPr>
+            <a:r>
+              <a:rPr lang="en-US" sz="900" b="1" dirty="0">
+                <a:solidFill>
+                  <a:srgbClr val="1A1A1A"/>
+                </a:solidFill>
+                <a:latin typeface="Calibri" pitchFamily="34" charset="0"/>
+                <a:ea typeface="Calibri" pitchFamily="34" charset="-122"/>
+                <a:cs typeface="Calibri" pitchFamily="34" charset="-120"/>
+              </a:rPr>
+              <a:t>Hackenburg persuasion-accuracy tradeoff at network scale.</a:t>
+            </a:r>
+            <a:endParaRPr lang="en-US" sz="900" dirty="0"/>
+          </a:p>
+        </p:txBody>
+      </p:sp>
+      <p:sp>
+        <p:nvSpPr>
+          <p:cNvPr id="78" name="Text 76"/>
+          <p:cNvSpPr/>
+          <p:nvPr/>
+        </p:nvSpPr>
+        <p:spPr>
+          <a:xfrm>
+            <a:off x="457200" y="5980176"/>
+            <a:ext cx="5532120" cy="237744"/>
           </a:xfrm>
           <a:prstGeom prst="rect">
             <a:avLst/>
@@ -2891,15 +3909,11 @@
           <a:bodyPr wrap="square" lIns="0" tIns="0" rIns="0" bIns="0" rtlCol="0" anchor="t"/>
           <a:lstStyle/>
           <a:p>
-            <a:pPr marL="342900" indent="-342900">
-              <a:spcAft>
-                <a:spcPts val="100"/>
-              </a:spcAft>
-              <a:buSzPct val="100000"/>
-              <a:buChar char="•"/>
-            </a:pPr>
-            <a:r>
-              <a:rPr lang="en-US" sz="950" b="1" dirty="0">
+            <a:pPr indent="0" marL="0">
+              <a:buNone/>
+            </a:pPr>
+            <a:r>
+              <a:rPr lang="en-US" sz="900" b="1" dirty="0">
                 <a:solidFill>
                   <a:srgbClr val="1F3A5F"/>
                 </a:solidFill>
@@ -2907,16 +3921,13 @@
                 <a:ea typeface="Calibri" pitchFamily="34" charset="-122"/>
                 <a:cs typeface="Calibri" pitchFamily="34" charset="-120"/>
               </a:rPr>
-              <a:t>Q2–Q3  </a:t>
+              <a:t>Step 8 defense: </a:t>
             </a:r>
             <a:pPr indent="0" marL="0">
-              <a:spcAft>
-                <a:spcPts val="100"/>
-              </a:spcAft>
-              <a:buNone/>
-            </a:pPr>
-            <a:r>
-              <a:rPr lang="en-US" sz="950" dirty="0">
+              <a:buNone/>
+            </a:pPr>
+            <a:r>
+              <a:rPr lang="en-US" sz="900" dirty="0">
                 <a:solidFill>
                   <a:srgbClr val="303030"/>
                 </a:solidFill>
@@ -2924,33 +3935,27 @@
                 <a:ea typeface="Calibri" pitchFamily="34" charset="-122"/>
                 <a:cs typeface="Calibri" pitchFamily="34" charset="-120"/>
               </a:rPr>
-              <a:t>Calibrated agent population; 3-layer validation. </a:t>
+              <a:t>pre-bunk 39% · friction 22% · combined </a:t>
             </a:r>
             <a:pPr indent="0" marL="0">
-              <a:spcAft>
-                <a:spcPts val="100"/>
-              </a:spcAft>
-              <a:buNone/>
-            </a:pPr>
-            <a:r>
-              <a:rPr lang="en-US" sz="950" dirty="0">
-                <a:solidFill>
-                  <a:srgbClr val="666666"/>
-                </a:solidFill>
-                <a:latin typeface="Calibri" pitchFamily="34" charset="0"/>
-                <a:ea typeface="Calibri" pitchFamily="34" charset="-122"/>
-                <a:cs typeface="Calibri" pitchFamily="34" charset="-120"/>
-              </a:rPr>
-              <a:t>M:</a:t>
+              <a:buNone/>
+            </a:pPr>
+            <a:r>
+              <a:rPr lang="en-US" sz="900" b="1" dirty="0">
+                <a:solidFill>
+                  <a:srgbClr val="2E7D5B"/>
+                </a:solidFill>
+                <a:latin typeface="Calibri" pitchFamily="34" charset="0"/>
+                <a:ea typeface="Calibri" pitchFamily="34" charset="-122"/>
+                <a:cs typeface="Calibri" pitchFamily="34" charset="-120"/>
+              </a:rPr>
+              <a:t>61% reduction</a:t>
             </a:r>
             <a:pPr indent="0" marL="0">
-              <a:spcAft>
-                <a:spcPts val="100"/>
-              </a:spcAft>
-              <a:buNone/>
-            </a:pPr>
-            <a:r>
-              <a:rPr lang="en-US" sz="950" dirty="0">
+              <a:buNone/>
+            </a:pPr>
+            <a:r>
+              <a:rPr lang="en-US" sz="900" dirty="0">
                 <a:solidFill>
                   <a:srgbClr val="303030"/>
                 </a:solidFill>
@@ -2958,116 +3963,22 @@
                 <a:ea typeface="Calibri" pitchFamily="34" charset="-122"/>
                 <a:cs typeface="Calibri" pitchFamily="34" charset="-120"/>
               </a:rPr>
-              <a:t> ≥70% Δ-agreement on held-out CMV cases.</a:t>
-            </a:r>
-            <a:endParaRPr lang="en-US" sz="950" dirty="0"/>
-          </a:p>
-        </p:txBody>
-      </p:sp>
-      <p:sp>
-        <p:nvSpPr>
-          <p:cNvPr id="52" name="Text 50"/>
-          <p:cNvSpPr/>
-          <p:nvPr/>
-        </p:nvSpPr>
-        <p:spPr>
-          <a:xfrm>
-            <a:off x="457200" y="4672584"/>
-            <a:ext cx="5532120" cy="329184"/>
-          </a:xfrm>
-          <a:prstGeom prst="rect">
-            <a:avLst/>
-          </a:prstGeom>
-          <a:noFill/>
-          <a:ln/>
-        </p:spPr>
-        <p:txBody>
-          <a:bodyPr wrap="square" lIns="0" tIns="0" rIns="0" bIns="0" rtlCol="0" anchor="t"/>
-          <a:lstStyle/>
-          <a:p>
-            <a:pPr marL="342900" indent="-342900">
-              <a:spcAft>
-                <a:spcPts val="100"/>
-              </a:spcAft>
-              <a:buSzPct val="100000"/>
-              <a:buChar char="•"/>
-            </a:pPr>
-            <a:r>
-              <a:rPr lang="en-US" sz="950" b="1" dirty="0">
-                <a:solidFill>
-                  <a:srgbClr val="1F3A5F"/>
-                </a:solidFill>
-                <a:latin typeface="Calibri" pitchFamily="34" charset="0"/>
-                <a:ea typeface="Calibri" pitchFamily="34" charset="-122"/>
-                <a:cs typeface="Calibri" pitchFamily="34" charset="-120"/>
-              </a:rPr>
-              <a:t>Q3–Q4  </a:t>
-            </a:r>
-            <a:pPr indent="0" marL="0">
-              <a:spcAft>
-                <a:spcPts val="100"/>
-              </a:spcAft>
-              <a:buNone/>
-            </a:pPr>
-            <a:r>
-              <a:rPr lang="en-US" sz="950" dirty="0">
-                <a:solidFill>
-                  <a:srgbClr val="303030"/>
-                </a:solidFill>
-                <a:latin typeface="Calibri" pitchFamily="34" charset="0"/>
-                <a:ea typeface="Calibri" pitchFamily="34" charset="-122"/>
-                <a:cs typeface="Calibri" pitchFamily="34" charset="-120"/>
-              </a:rPr>
-              <a:t>Persuasion + paired inoculation experiments; pilot on G45 data. </a:t>
-            </a:r>
-            <a:pPr indent="0" marL="0">
-              <a:spcAft>
-                <a:spcPts val="100"/>
-              </a:spcAft>
-              <a:buNone/>
-            </a:pPr>
-            <a:r>
-              <a:rPr lang="en-US" sz="950" dirty="0">
-                <a:solidFill>
-                  <a:srgbClr val="666666"/>
-                </a:solidFill>
-                <a:latin typeface="Calibri" pitchFamily="34" charset="0"/>
-                <a:ea typeface="Calibri" pitchFamily="34" charset="-122"/>
-                <a:cs typeface="Calibri" pitchFamily="34" charset="-120"/>
-              </a:rPr>
-              <a:t>M:</a:t>
-            </a:r>
-            <a:pPr indent="0" marL="0">
-              <a:spcAft>
-                <a:spcPts val="100"/>
-              </a:spcAft>
-              <a:buNone/>
-            </a:pPr>
-            <a:r>
-              <a:rPr lang="en-US" sz="950" dirty="0">
-                <a:solidFill>
-                  <a:srgbClr val="303030"/>
-                </a:solidFill>
-                <a:latin typeface="Calibri" pitchFamily="34" charset="0"/>
-                <a:ea typeface="Calibri" pitchFamily="34" charset="-122"/>
-                <a:cs typeface="Calibri" pitchFamily="34" charset="-120"/>
-              </a:rPr>
-              <a:t> lever-effect matrix + defense curves.</a:t>
-            </a:r>
-            <a:endParaRPr lang="en-US" sz="950" dirty="0"/>
-          </a:p>
-        </p:txBody>
-      </p:sp>
-      <p:sp>
-        <p:nvSpPr>
-          <p:cNvPr id="53" name="Shape 51"/>
-          <p:cNvSpPr/>
-          <p:nvPr/>
-        </p:nvSpPr>
-        <p:spPr>
-          <a:xfrm>
-            <a:off x="457200" y="5056632"/>
-            <a:ext cx="5440680" cy="329184"/>
+              <a:t> — paired offense/defense (BRIES-mirror)</a:t>
+            </a:r>
+            <a:endParaRPr lang="en-US" sz="900" dirty="0"/>
+          </a:p>
+        </p:txBody>
+      </p:sp>
+      <p:sp>
+        <p:nvSpPr>
+          <p:cNvPr id="79" name="Shape 77"/>
+          <p:cNvSpPr/>
+          <p:nvPr/>
+        </p:nvSpPr>
+        <p:spPr>
+          <a:xfrm>
+            <a:off x="457200" y="6254496"/>
+            <a:ext cx="5440680" cy="292608"/>
           </a:xfrm>
           <a:prstGeom prst="rect">
             <a:avLst/>
@@ -3085,14 +3996,14 @@
       </p:sp>
       <p:sp>
         <p:nvSpPr>
-          <p:cNvPr id="54" name="Text 52"/>
-          <p:cNvSpPr/>
-          <p:nvPr/>
-        </p:nvSpPr>
-        <p:spPr>
-          <a:xfrm>
-            <a:off x="548640" y="5093208"/>
-            <a:ext cx="5257800" cy="256032"/>
+          <p:cNvPr id="80" name="Text 78"/>
+          <p:cNvSpPr/>
+          <p:nvPr/>
+        </p:nvSpPr>
+        <p:spPr>
+          <a:xfrm>
+            <a:off x="548640" y="6291072"/>
+            <a:ext cx="5257800" cy="219456"/>
           </a:xfrm>
           <a:prstGeom prst="rect">
             <a:avLst/>
@@ -3138,89 +4049,7 @@
       </p:sp>
       <p:sp>
         <p:nvSpPr>
-          <p:cNvPr id="55" name="Text 53"/>
-          <p:cNvSpPr/>
-          <p:nvPr/>
-        </p:nvSpPr>
-        <p:spPr>
-          <a:xfrm>
-            <a:off x="457200" y="5477256"/>
-            <a:ext cx="5532120" cy="201168"/>
-          </a:xfrm>
-          <a:prstGeom prst="rect">
-            <a:avLst/>
-          </a:prstGeom>
-          <a:noFill/>
-          <a:ln/>
-        </p:spPr>
-        <p:txBody>
-          <a:bodyPr wrap="square" lIns="0" tIns="0" rIns="0" bIns="0" rtlCol="0" anchor="ctr"/>
-          <a:lstStyle/>
-          <a:p>
-            <a:pPr indent="0" marL="0">
-              <a:buNone/>
-            </a:pPr>
-            <a:r>
-              <a:rPr lang="en-US" sz="1050" b="1" i="1" dirty="0">
-                <a:solidFill>
-                  <a:srgbClr val="1F3A5F"/>
-                </a:solidFill>
-                <a:latin typeface="Calibri" pitchFamily="34" charset="0"/>
-                <a:ea typeface="Calibri" pitchFamily="34" charset="-122"/>
-                <a:cs typeface="Calibri" pitchFamily="34" charset="-120"/>
-              </a:rPr>
-              <a:t>Previous Accomplishments</a:t>
-            </a:r>
-            <a:endParaRPr lang="en-US" sz="1050" dirty="0"/>
-          </a:p>
-        </p:txBody>
-      </p:sp>
-      <p:sp>
-        <p:nvSpPr>
-          <p:cNvPr id="56" name="Text 54"/>
-          <p:cNvSpPr/>
-          <p:nvPr/>
-        </p:nvSpPr>
-        <p:spPr>
-          <a:xfrm>
-            <a:off x="457200" y="5678424"/>
-            <a:ext cx="5532120" cy="274320"/>
-          </a:xfrm>
-          <a:prstGeom prst="rect">
-            <a:avLst/>
-          </a:prstGeom>
-          <a:noFill/>
-          <a:ln/>
-        </p:spPr>
-        <p:txBody>
-          <a:bodyPr wrap="square" lIns="0" tIns="0" rIns="0" bIns="0" rtlCol="0" anchor="t"/>
-          <a:lstStyle/>
-          <a:p>
-            <a:pPr marL="342900" indent="-342900">
-              <a:spcAft>
-                <a:spcPts val="100"/>
-              </a:spcAft>
-              <a:buSzPct val="100000"/>
-              <a:buChar char="•"/>
-            </a:pPr>
-            <a:r>
-              <a:rPr lang="en-US" sz="900" dirty="0">
-                <a:solidFill>
-                  <a:srgbClr val="666666"/>
-                </a:solidFill>
-                <a:latin typeface="Calibri" pitchFamily="34" charset="0"/>
-                <a:ea typeface="Calibri" pitchFamily="34" charset="-122"/>
-                <a:cs typeface="Calibri" pitchFamily="34" charset="-120"/>
-              </a:rPr>
-              <a:t>[Add prior publications, Seedlings, ACC, or related Group work here] </a:t>
-            </a:r>
-            <a:endParaRPr lang="en-US" sz="900" dirty="0"/>
-          </a:p>
-        </p:txBody>
-      </p:sp>
-      <p:sp>
-        <p:nvSpPr>
-          <p:cNvPr id="57" name="Text 55"/>
+          <p:cNvPr id="81" name="Text 79"/>
           <p:cNvSpPr/>
           <p:nvPr/>
         </p:nvSpPr>
@@ -3259,7 +4088,7 @@
       </p:sp>
       <p:sp>
         <p:nvSpPr>
-          <p:cNvPr id="58" name="Shape 56"/>
+          <p:cNvPr id="82" name="Shape 80"/>
           <p:cNvSpPr/>
           <p:nvPr/>
         </p:nvSpPr>
@@ -3284,7 +4113,7 @@
       </p:sp>
       <p:sp>
         <p:nvSpPr>
-          <p:cNvPr id="59" name="Text 57"/>
+          <p:cNvPr id="83" name="Text 81"/>
           <p:cNvSpPr/>
           <p:nvPr/>
         </p:nvSpPr>
@@ -3323,7 +4152,7 @@
       </p:sp>
       <p:sp>
         <p:nvSpPr>
-          <p:cNvPr id="60" name="Shape 58"/>
+          <p:cNvPr id="84" name="Shape 82"/>
           <p:cNvSpPr/>
           <p:nvPr/>
         </p:nvSpPr>
@@ -3348,7 +4177,7 @@
       </p:sp>
       <p:sp>
         <p:nvSpPr>
-          <p:cNvPr id="61" name="Text 59"/>
+          <p:cNvPr id="85" name="Text 83"/>
           <p:cNvSpPr/>
           <p:nvPr/>
         </p:nvSpPr>
@@ -3387,7 +4216,7 @@
       </p:sp>
       <p:sp>
         <p:nvSpPr>
-          <p:cNvPr id="62" name="Shape 60"/>
+          <p:cNvPr id="86" name="Shape 84"/>
           <p:cNvSpPr/>
           <p:nvPr/>
         </p:nvSpPr>
@@ -3412,7 +4241,7 @@
       </p:sp>
       <p:sp>
         <p:nvSpPr>
-          <p:cNvPr id="63" name="Text 61"/>
+          <p:cNvPr id="87" name="Text 85"/>
           <p:cNvSpPr/>
           <p:nvPr/>
         </p:nvSpPr>
@@ -3451,7 +4280,7 @@
       </p:sp>
       <p:sp>
         <p:nvSpPr>
-          <p:cNvPr id="64" name="Shape 62"/>
+          <p:cNvPr id="88" name="Shape 86"/>
           <p:cNvSpPr/>
           <p:nvPr/>
         </p:nvSpPr>
@@ -3476,7 +4305,7 @@
       </p:sp>
       <p:sp>
         <p:nvSpPr>
-          <p:cNvPr id="65" name="Text 63"/>
+          <p:cNvPr id="89" name="Text 87"/>
           <p:cNvSpPr/>
           <p:nvPr/>
         </p:nvSpPr>
@@ -3515,7 +4344,7 @@
       </p:sp>
       <p:sp>
         <p:nvSpPr>
-          <p:cNvPr id="66" name="Shape 64"/>
+          <p:cNvPr id="90" name="Shape 88"/>
           <p:cNvSpPr/>
           <p:nvPr/>
         </p:nvSpPr>
@@ -3540,7 +4369,7 @@
       </p:sp>
       <p:sp>
         <p:nvSpPr>
-          <p:cNvPr id="67" name="Text 65"/>
+          <p:cNvPr id="91" name="Text 89"/>
           <p:cNvSpPr/>
           <p:nvPr/>
         </p:nvSpPr>
@@ -3579,7 +4408,7 @@
       </p:sp>
       <p:sp>
         <p:nvSpPr>
-          <p:cNvPr id="68" name="Shape 66"/>
+          <p:cNvPr id="92" name="Shape 90"/>
           <p:cNvSpPr/>
           <p:nvPr/>
         </p:nvSpPr>
@@ -3604,7 +4433,7 @@
       </p:sp>
       <p:sp>
         <p:nvSpPr>
-          <p:cNvPr id="69" name="Text 67"/>
+          <p:cNvPr id="93" name="Text 91"/>
           <p:cNvSpPr/>
           <p:nvPr/>
         </p:nvSpPr>
@@ -3643,7 +4472,7 @@
       </p:sp>
       <p:sp>
         <p:nvSpPr>
-          <p:cNvPr id="70" name="Shape 68"/>
+          <p:cNvPr id="94" name="Shape 92"/>
           <p:cNvSpPr/>
           <p:nvPr/>
         </p:nvSpPr>
@@ -3668,7 +4497,7 @@
       </p:sp>
       <p:sp>
         <p:nvSpPr>
-          <p:cNvPr id="71" name="Text 69"/>
+          <p:cNvPr id="95" name="Text 93"/>
           <p:cNvSpPr/>
           <p:nvPr/>
         </p:nvSpPr>
@@ -3707,7 +4536,7 @@
       </p:sp>
       <p:sp>
         <p:nvSpPr>
-          <p:cNvPr id="72" name="Shape 70"/>
+          <p:cNvPr id="96" name="Shape 94"/>
           <p:cNvSpPr/>
           <p:nvPr/>
         </p:nvSpPr>
@@ -3732,7 +4561,7 @@
       </p:sp>
       <p:sp>
         <p:nvSpPr>
-          <p:cNvPr id="73" name="Text 71"/>
+          <p:cNvPr id="97" name="Text 95"/>
           <p:cNvSpPr/>
           <p:nvPr/>
         </p:nvSpPr>
@@ -3771,7 +4600,7 @@
       </p:sp>
       <p:sp>
         <p:nvSpPr>
-          <p:cNvPr id="74" name="Shape 72"/>
+          <p:cNvPr id="98" name="Shape 96"/>
           <p:cNvSpPr/>
           <p:nvPr/>
         </p:nvSpPr>
@@ -3796,7 +4625,7 @@
       </p:sp>
       <p:sp>
         <p:nvSpPr>
-          <p:cNvPr id="75" name="Text 73"/>
+          <p:cNvPr id="99" name="Text 97"/>
           <p:cNvSpPr/>
           <p:nvPr/>
         </p:nvSpPr>
@@ -3835,7 +4664,7 @@
       </p:sp>
       <p:sp>
         <p:nvSpPr>
-          <p:cNvPr id="76" name="Shape 74"/>
+          <p:cNvPr id="100" name="Shape 98"/>
           <p:cNvSpPr/>
           <p:nvPr/>
         </p:nvSpPr>
@@ -3860,7 +4689,7 @@
       </p:sp>
       <p:sp>
         <p:nvSpPr>
-          <p:cNvPr id="77" name="Text 75"/>
+          <p:cNvPr id="101" name="Text 99"/>
           <p:cNvSpPr/>
           <p:nvPr/>
         </p:nvSpPr>
@@ -3899,7 +4728,7 @@
       </p:sp>
       <p:sp>
         <p:nvSpPr>
-          <p:cNvPr id="78" name="Shape 76"/>
+          <p:cNvPr id="102" name="Shape 100"/>
           <p:cNvSpPr/>
           <p:nvPr/>
         </p:nvSpPr>
@@ -3924,7 +4753,7 @@
       </p:sp>
       <p:sp>
         <p:nvSpPr>
-          <p:cNvPr id="79" name="Text 77"/>
+          <p:cNvPr id="103" name="Text 101"/>
           <p:cNvSpPr/>
           <p:nvPr/>
         </p:nvSpPr>
@@ -3963,7 +4792,7 @@
       </p:sp>
       <p:sp>
         <p:nvSpPr>
-          <p:cNvPr id="80" name="Shape 78"/>
+          <p:cNvPr id="104" name="Shape 102"/>
           <p:cNvSpPr/>
           <p:nvPr/>
         </p:nvSpPr>
@@ -3988,7 +4817,7 @@
       </p:sp>
       <p:sp>
         <p:nvSpPr>
-          <p:cNvPr id="81" name="Text 79"/>
+          <p:cNvPr id="105" name="Text 103"/>
           <p:cNvSpPr/>
           <p:nvPr/>
         </p:nvSpPr>
@@ -4027,7 +4856,7 @@
       </p:sp>
       <p:sp>
         <p:nvSpPr>
-          <p:cNvPr id="82" name="Shape 80"/>
+          <p:cNvPr id="106" name="Shape 104"/>
           <p:cNvSpPr/>
           <p:nvPr/>
         </p:nvSpPr>
@@ -4052,7 +4881,7 @@
       </p:sp>
       <p:sp>
         <p:nvSpPr>
-          <p:cNvPr id="83" name="Text 81"/>
+          <p:cNvPr id="107" name="Text 105"/>
           <p:cNvSpPr/>
           <p:nvPr/>
         </p:nvSpPr>
@@ -4091,7 +4920,7 @@
       </p:sp>
       <p:sp>
         <p:nvSpPr>
-          <p:cNvPr id="84" name="Shape 82"/>
+          <p:cNvPr id="108" name="Shape 106"/>
           <p:cNvSpPr/>
           <p:nvPr/>
         </p:nvSpPr>
@@ -4116,7 +4945,7 @@
       </p:sp>
       <p:sp>
         <p:nvSpPr>
-          <p:cNvPr id="85" name="Text 83"/>
+          <p:cNvPr id="109" name="Text 107"/>
           <p:cNvSpPr/>
           <p:nvPr/>
         </p:nvSpPr>
@@ -4155,7 +4984,7 @@
       </p:sp>
       <p:sp>
         <p:nvSpPr>
-          <p:cNvPr id="86" name="Shape 84"/>
+          <p:cNvPr id="110" name="Shape 108"/>
           <p:cNvSpPr/>
           <p:nvPr/>
         </p:nvSpPr>
@@ -4180,7 +5009,7 @@
       </p:sp>
       <p:sp>
         <p:nvSpPr>
-          <p:cNvPr id="87" name="Text 85"/>
+          <p:cNvPr id="111" name="Text 109"/>
           <p:cNvSpPr/>
           <p:nvPr/>
         </p:nvSpPr>
@@ -4219,7 +5048,7 @@
       </p:sp>
       <p:sp>
         <p:nvSpPr>
-          <p:cNvPr id="88" name="Shape 86"/>
+          <p:cNvPr id="112" name="Shape 110"/>
           <p:cNvSpPr/>
           <p:nvPr/>
         </p:nvSpPr>
@@ -4244,7 +5073,7 @@
       </p:sp>
       <p:sp>
         <p:nvSpPr>
-          <p:cNvPr id="89" name="Shape 87"/>
+          <p:cNvPr id="113" name="Shape 111"/>
           <p:cNvSpPr/>
           <p:nvPr/>
         </p:nvSpPr>
@@ -4269,7 +5098,7 @@
       </p:sp>
       <p:sp>
         <p:nvSpPr>
-          <p:cNvPr id="90" name="Text 88"/>
+          <p:cNvPr id="114" name="Text 112"/>
           <p:cNvSpPr/>
           <p:nvPr/>
         </p:nvSpPr>
@@ -4308,7 +5137,7 @@
       </p:sp>
       <p:sp>
         <p:nvSpPr>
-          <p:cNvPr id="91" name="Shape 89"/>
+          <p:cNvPr id="115" name="Shape 113"/>
           <p:cNvSpPr/>
           <p:nvPr/>
         </p:nvSpPr>
@@ -4333,7 +5162,7 @@
       </p:sp>
       <p:sp>
         <p:nvSpPr>
-          <p:cNvPr id="92" name="Text 90"/>
+          <p:cNvPr id="116" name="Text 114"/>
           <p:cNvSpPr/>
           <p:nvPr/>
         </p:nvSpPr>
@@ -4372,7 +5201,7 @@
       </p:sp>
       <p:sp>
         <p:nvSpPr>
-          <p:cNvPr id="93" name="Shape 91"/>
+          <p:cNvPr id="117" name="Shape 115"/>
           <p:cNvSpPr/>
           <p:nvPr/>
         </p:nvSpPr>
@@ -4397,7 +5226,7 @@
       </p:sp>
       <p:sp>
         <p:nvSpPr>
-          <p:cNvPr id="94" name="Text 92"/>
+          <p:cNvPr id="118" name="Text 116"/>
           <p:cNvSpPr/>
           <p:nvPr/>
         </p:nvSpPr>
@@ -4436,7 +5265,7 @@
       </p:sp>
       <p:sp>
         <p:nvSpPr>
-          <p:cNvPr id="95" name="Shape 93"/>
+          <p:cNvPr id="119" name="Shape 117"/>
           <p:cNvSpPr/>
           <p:nvPr/>
         </p:nvSpPr>
@@ -4461,7 +5290,7 @@
       </p:sp>
       <p:sp>
         <p:nvSpPr>
-          <p:cNvPr id="96" name="Text 94"/>
+          <p:cNvPr id="120" name="Text 118"/>
           <p:cNvSpPr/>
           <p:nvPr/>
         </p:nvSpPr>
@@ -4500,7 +5329,7 @@
       </p:sp>
       <p:sp>
         <p:nvSpPr>
-          <p:cNvPr id="97" name="Shape 95"/>
+          <p:cNvPr id="121" name="Shape 119"/>
           <p:cNvSpPr/>
           <p:nvPr/>
         </p:nvSpPr>
@@ -4525,7 +5354,7 @@
       </p:sp>
       <p:sp>
         <p:nvSpPr>
-          <p:cNvPr id="98" name="Text 96"/>
+          <p:cNvPr id="122" name="Text 120"/>
           <p:cNvSpPr/>
           <p:nvPr/>
         </p:nvSpPr>
@@ -4564,7 +5393,7 @@
       </p:sp>
       <p:sp>
         <p:nvSpPr>
-          <p:cNvPr id="99" name="Shape 97"/>
+          <p:cNvPr id="123" name="Shape 121"/>
           <p:cNvSpPr/>
           <p:nvPr/>
         </p:nvSpPr>
@@ -4589,7 +5418,7 @@
       </p:sp>
       <p:sp>
         <p:nvSpPr>
-          <p:cNvPr id="100" name="Text 98"/>
+          <p:cNvPr id="124" name="Text 122"/>
           <p:cNvSpPr/>
           <p:nvPr/>
         </p:nvSpPr>
@@ -4628,7 +5457,7 @@
       </p:sp>
       <p:sp>
         <p:nvSpPr>
-          <p:cNvPr id="101" name="Shape 99"/>
+          <p:cNvPr id="125" name="Shape 123"/>
           <p:cNvSpPr/>
           <p:nvPr/>
         </p:nvSpPr>
@@ -4653,7 +5482,7 @@
       </p:sp>
       <p:sp>
         <p:nvSpPr>
-          <p:cNvPr id="102" name="Text 100"/>
+          <p:cNvPr id="126" name="Text 124"/>
           <p:cNvSpPr/>
           <p:nvPr/>
         </p:nvSpPr>
@@ -4692,7 +5521,7 @@
       </p:sp>
       <p:sp>
         <p:nvSpPr>
-          <p:cNvPr id="103" name="Shape 101"/>
+          <p:cNvPr id="127" name="Shape 125"/>
           <p:cNvSpPr/>
           <p:nvPr/>
         </p:nvSpPr>
@@ -4717,7 +5546,7 @@
       </p:sp>
       <p:sp>
         <p:nvSpPr>
-          <p:cNvPr id="104" name="Text 102"/>
+          <p:cNvPr id="128" name="Text 126"/>
           <p:cNvSpPr/>
           <p:nvPr/>
         </p:nvSpPr>
@@ -4756,7 +5585,7 @@
       </p:sp>
       <p:sp>
         <p:nvSpPr>
-          <p:cNvPr id="105" name="Shape 103"/>
+          <p:cNvPr id="129" name="Shape 127"/>
           <p:cNvSpPr/>
           <p:nvPr/>
         </p:nvSpPr>
@@ -4781,7 +5610,7 @@
       </p:sp>
       <p:sp>
         <p:nvSpPr>
-          <p:cNvPr id="106" name="Text 104"/>
+          <p:cNvPr id="130" name="Text 128"/>
           <p:cNvSpPr/>
           <p:nvPr/>
         </p:nvSpPr>
@@ -4820,7 +5649,7 @@
       </p:sp>
       <p:sp>
         <p:nvSpPr>
-          <p:cNvPr id="107" name="Shape 105"/>
+          <p:cNvPr id="131" name="Shape 129"/>
           <p:cNvSpPr/>
           <p:nvPr/>
         </p:nvSpPr>
@@ -4845,7 +5674,7 @@
       </p:sp>
       <p:sp>
         <p:nvSpPr>
-          <p:cNvPr id="108" name="Text 106"/>
+          <p:cNvPr id="132" name="Text 130"/>
           <p:cNvSpPr/>
           <p:nvPr/>
         </p:nvSpPr>
@@ -4884,7 +5713,7 @@
       </p:sp>
       <p:sp>
         <p:nvSpPr>
-          <p:cNvPr id="109" name="Shape 107"/>
+          <p:cNvPr id="133" name="Shape 131"/>
           <p:cNvSpPr/>
           <p:nvPr/>
         </p:nvSpPr>
@@ -4909,7 +5738,7 @@
       </p:sp>
       <p:sp>
         <p:nvSpPr>
-          <p:cNvPr id="110" name="Text 108"/>
+          <p:cNvPr id="134" name="Text 132"/>
           <p:cNvSpPr/>
           <p:nvPr/>
         </p:nvSpPr>
@@ -4948,7 +5777,7 @@
       </p:sp>
       <p:sp>
         <p:nvSpPr>
-          <p:cNvPr id="111" name="Text 109"/>
+          <p:cNvPr id="135" name="Text 133"/>
           <p:cNvSpPr/>
           <p:nvPr/>
         </p:nvSpPr>
@@ -5001,7 +5830,7 @@
       </p:sp>
       <p:sp>
         <p:nvSpPr>
-          <p:cNvPr id="112" name="Shape 110"/>
+          <p:cNvPr id="136" name="Shape 134"/>
           <p:cNvSpPr/>
           <p:nvPr/>
         </p:nvSpPr>
@@ -5026,7 +5855,7 @@
       </p:sp>
       <p:sp>
         <p:nvSpPr>
-          <p:cNvPr id="113" name="Text 111"/>
+          <p:cNvPr id="137" name="Text 135"/>
           <p:cNvSpPr/>
           <p:nvPr/>
         </p:nvSpPr>
@@ -5107,7 +5936,7 @@
       </p:sp>
       <p:sp>
         <p:nvSpPr>
-          <p:cNvPr id="114" name="Text 112"/>
+          <p:cNvPr id="138" name="Text 136"/>
           <p:cNvSpPr/>
           <p:nvPr/>
         </p:nvSpPr>
@@ -5146,7 +5975,7 @@
       </p:sp>
       <p:sp>
         <p:nvSpPr>
-          <p:cNvPr id="115" name="Text 113"/>
+          <p:cNvPr id="139" name="Text 137"/>
           <p:cNvSpPr/>
           <p:nvPr/>
         </p:nvSpPr>
